--- a/bigtree/samples/bigtree_lab_charts.pptx
+++ b/bigtree/samples/bigtree_lab_charts.pptx
@@ -15,6 +15,11 @@
     <p:sldId id="301" r:id="rIdChartSlide1"/>
     <p:sldId id="302" r:id="rIdChartSlide2"/>
     <p:sldId id="303" r:id="rIdChartSlide3"/>
+    <p:sldId id="304" r:id="rIdChartSlide4"/>
+    <p:sldId id="305" r:id="rIdChartSlide5"/>
+    <p:sldId id="306" r:id="rIdChartSlide6"/>
+    <p:sldId id="307" r:id="rIdChartSlide7"/>
+    <p:sldId id="308" r:id="rIdChartSlide8"/>
   </p:sldIdLst>
   <p:sldSz cx="9144000" cy="5143500"/>
   <p:notesSz cx="6858000" cy="9144000"/>
@@ -62,6 +67,31 @@
               </c:strCache>
             </c:strRef>
           </c:tx>
+          <c:dLbls>
+            <c:txPr>
+              <a:bodyPr/>
+              <a:lstStyle/>
+              <a:p>
+                <a:pPr>
+                  <a:defRPr sz="1100">
+                    <a:solidFill>
+                      <a:schemeClr val="tx1"/>
+                    </a:solidFill>
+                    <a:latin typeface="+mn-lt"/>
+                    <a:ea typeface="+mn-ea"/>
+                  </a:defRPr>
+                </a:pPr>
+                <a:endParaRPr lang="ja-JP"/>
+              </a:p>
+            </c:txPr>
+            <c:dLblPos val="outEnd"/>
+            <c:showLegendKey val="0"/>
+            <c:showVal val="1"/>
+            <c:showCatName val="0"/>
+            <c:showSerName val="0"/>
+            <c:showPercent val="0"/>
+            <c:showBubbleSize val="0"/>
+          </c:dLbls>
           <c:cat>
             <c:strRef>
               <c:f>Sheet1!$A$2:$A$5</c:f>
@@ -118,6 +148,31 @@
               </c:strCache>
             </c:strRef>
           </c:tx>
+          <c:dLbls>
+            <c:txPr>
+              <a:bodyPr/>
+              <a:lstStyle/>
+              <a:p>
+                <a:pPr>
+                  <a:defRPr sz="1100">
+                    <a:solidFill>
+                      <a:schemeClr val="tx1"/>
+                    </a:solidFill>
+                    <a:latin typeface="+mn-lt"/>
+                    <a:ea typeface="+mn-ea"/>
+                  </a:defRPr>
+                </a:pPr>
+                <a:endParaRPr lang="ja-JP"/>
+              </a:p>
+            </c:txPr>
+            <c:dLblPos val="outEnd"/>
+            <c:showLegendKey val="0"/>
+            <c:showVal val="1"/>
+            <c:showCatName val="0"/>
+            <c:showSerName val="0"/>
+            <c:showPercent val="0"/>
+            <c:showBubbleSize val="0"/>
+          </c:dLbls>
           <c:cat>
             <c:strRef>
               <c:f>Sheet1!$A$2:$A$5</c:f>
@@ -188,7 +243,7 @@
           <a:lstStyle/>
           <a:p>
             <a:pPr>
-              <a:defRPr sz="1000">
+              <a:defRPr sz="1100">
                 <a:solidFill>
                   <a:schemeClr val="tx2"/>
                 </a:solidFill>
@@ -209,16 +264,15 @@
         <c:axId val="1002"/>
         <c:scaling>
           <c:orientation val="minMax"/>
+          <c:min val="0"/>
         </c:scaling>
-        <c:delete val="0"/>
+        <c:delete val="1"/>
         <c:axPos val="l"/>
         <c:majorGridlines>
           <c:spPr>
             <a:ln w="6350">
               <a:solidFill>
-                <a:schemeClr val="bg2">
-                  <a:lumMod val="90000"/>
-                </a:schemeClr>
+                <a:schemeClr val="accent5"/>
               </a:solidFill>
             </a:ln>
           </c:spPr>
@@ -237,7 +291,7 @@
           <a:lstStyle/>
           <a:p>
             <a:pPr>
-              <a:defRPr sz="1000">
+              <a:defRPr sz="1100">
                 <a:solidFill>
                   <a:schemeClr val="tx2"/>
                 </a:solidFill>
@@ -261,7 +315,7 @@
         <a:lstStyle/>
         <a:p>
           <a:pPr>
-            <a:defRPr sz="1000">
+            <a:defRPr sz="1100">
               <a:solidFill>
                 <a:schemeClr val="tx1"/>
               </a:solidFill>
@@ -287,7 +341,7 @@
     <a:lstStyle/>
     <a:p>
       <a:pPr>
-        <a:defRPr sz="1000">
+        <a:defRPr sz="1100">
           <a:solidFill>
             <a:schemeClr val="tx1"/>
           </a:solidFill>
@@ -333,14 +387,49 @@
           <c:spPr>
             <a:ln w="19050" cap="rnd">
               <a:solidFill>
-                <a:schemeClr val="tx2"/>
+                <a:schemeClr val="accent4"/>
               </a:solidFill>
               <a:round/>
             </a:ln>
           </c:spPr>
           <c:marker>
-            <c:symbol val="none"/>
+            <c:symbol val="circle"/>
+            <c:size val="6"/>
           </c:marker>
+          <c:dLbls>
+            <c:dLbl>
+              <c:idx val="3"/>
+              <c:txPr>
+                <a:bodyPr/>
+                <a:lstStyle/>
+                <a:p>
+                  <a:pPr>
+                    <a:defRPr sz="1100">
+                      <a:solidFill>
+                        <a:schemeClr val="tx1"/>
+                      </a:solidFill>
+                      <a:latin typeface="+mn-lt"/>
+                      <a:ea typeface="+mn-ea"/>
+                    </a:defRPr>
+                  </a:pPr>
+                  <a:endParaRPr lang="ja-JP"/>
+                </a:p>
+              </c:txPr>
+              <c:dLblPos val="r"/>
+              <c:showLegendKey val="0"/>
+              <c:showVal val="1"/>
+              <c:showCatName val="0"/>
+              <c:showSerName val="1"/>
+              <c:showPercent val="0"/>
+              <c:showBubbleSize val="0"/>
+            </c:dLbl>
+            <c:showLegendKey val="0"/>
+            <c:showVal val="0"/>
+            <c:showCatName val="0"/>
+            <c:showSerName val="0"/>
+            <c:showPercent val="0"/>
+            <c:showBubbleSize val="0"/>
+          </c:dLbls>
           <c:cat>
             <c:strRef>
               <c:f>Sheet1!$A$2:$A$5</c:f>
@@ -401,14 +490,49 @@
           <c:spPr>
             <a:ln w="19050" cap="rnd">
               <a:solidFill>
-                <a:schemeClr val="tx2"/>
+                <a:schemeClr val="accent4"/>
               </a:solidFill>
               <a:round/>
             </a:ln>
           </c:spPr>
           <c:marker>
-            <c:symbol val="none"/>
+            <c:symbol val="circle"/>
+            <c:size val="6"/>
           </c:marker>
+          <c:dLbls>
+            <c:dLbl>
+              <c:idx val="3"/>
+              <c:txPr>
+                <a:bodyPr/>
+                <a:lstStyle/>
+                <a:p>
+                  <a:pPr>
+                    <a:defRPr sz="1100">
+                      <a:solidFill>
+                        <a:schemeClr val="tx1"/>
+                      </a:solidFill>
+                      <a:latin typeface="+mn-lt"/>
+                      <a:ea typeface="+mn-ea"/>
+                    </a:defRPr>
+                  </a:pPr>
+                  <a:endParaRPr lang="ja-JP"/>
+                </a:p>
+              </c:txPr>
+              <c:dLblPos val="r"/>
+              <c:showLegendKey val="0"/>
+              <c:showVal val="1"/>
+              <c:showCatName val="0"/>
+              <c:showSerName val="1"/>
+              <c:showPercent val="0"/>
+              <c:showBubbleSize val="0"/>
+            </c:dLbl>
+            <c:showLegendKey val="0"/>
+            <c:showVal val="0"/>
+            <c:showCatName val="0"/>
+            <c:showSerName val="0"/>
+            <c:showPercent val="0"/>
+            <c:showBubbleSize val="0"/>
+          </c:dLbls>
           <c:cat>
             <c:strRef>
               <c:f>Sheet1!$A$2:$A$5</c:f>
@@ -475,8 +599,69 @@
             </a:ln>
           </c:spPr>
           <c:marker>
-            <c:symbol val="none"/>
+            <c:symbol val="circle"/>
+            <c:size val="6"/>
           </c:marker>
+          <c:dLbls>
+            <c:dLbl>
+              <c:idx val="0"/>
+              <c:txPr>
+                <a:bodyPr/>
+                <a:lstStyle/>
+                <a:p>
+                  <a:pPr>
+                    <a:defRPr sz="1100">
+                      <a:solidFill>
+                        <a:schemeClr val="tx1"/>
+                      </a:solidFill>
+                      <a:latin typeface="+mn-lt"/>
+                      <a:ea typeface="+mn-ea"/>
+                    </a:defRPr>
+                  </a:pPr>
+                  <a:endParaRPr lang="ja-JP"/>
+                </a:p>
+              </c:txPr>
+              <c:dLblPos val="r"/>
+              <c:showLegendKey val="0"/>
+              <c:showVal val="1"/>
+              <c:showCatName val="0"/>
+              <c:showSerName val="0"/>
+              <c:showPercent val="0"/>
+              <c:showBubbleSize val="0"/>
+            </c:dLbl>
+            <c:dLbl>
+              <c:idx val="3"/>
+              <c:txPr>
+                <a:bodyPr/>
+                <a:lstStyle/>
+                <a:p>
+                  <a:pPr>
+                    <a:defRPr sz="1100">
+                      <a:solidFill>
+                        <a:schemeClr val="tx1"/>
+                      </a:solidFill>
+                      <a:latin typeface="+mn-lt"/>
+                      <a:ea typeface="+mn-ea"/>
+                    </a:defRPr>
+                  </a:pPr>
+                  <a:endParaRPr lang="ja-JP"/>
+                </a:p>
+              </c:txPr>
+              <c:dLblPos val="r"/>
+              <c:showLegendKey val="0"/>
+              <c:showVal val="1"/>
+              <c:showCatName val="0"/>
+              <c:showSerName val="1"/>
+              <c:showPercent val="0"/>
+              <c:showBubbleSize val="0"/>
+            </c:dLbl>
+            <c:showLegendKey val="0"/>
+            <c:showVal val="0"/>
+            <c:showCatName val="0"/>
+            <c:showSerName val="0"/>
+            <c:showPercent val="0"/>
+            <c:showBubbleSize val="0"/>
+          </c:dLbls>
           <c:cat>
             <c:strRef>
               <c:f>Sheet1!$A$2:$A$5</c:f>
@@ -547,7 +732,7 @@
           <a:lstStyle/>
           <a:p>
             <a:pPr>
-              <a:defRPr sz="1000">
+              <a:defRPr sz="1100">
                 <a:solidFill>
                   <a:schemeClr val="tx2"/>
                 </a:solidFill>
@@ -575,9 +760,7 @@
           <c:spPr>
             <a:ln w="6350">
               <a:solidFill>
-                <a:schemeClr val="bg2">
-                  <a:lumMod val="90000"/>
-                </a:schemeClr>
+                <a:schemeClr val="accent5"/>
               </a:solidFill>
             </a:ln>
           </c:spPr>
@@ -596,7 +779,7 @@
           <a:lstStyle/>
           <a:p>
             <a:pPr>
-              <a:defRPr sz="1000">
+              <a:defRPr sz="1100">
                 <a:solidFill>
                   <a:schemeClr val="tx2"/>
                 </a:solidFill>
@@ -612,26 +795,6 @@
         <c:crossBetween val="between"/>
       </c:valAx>
     </c:plotArea>
-    <c:legend>
-      <c:legendPos val="b"/>
-      <c:overlay val="0"/>
-      <c:txPr>
-        <a:bodyPr/>
-        <a:lstStyle/>
-        <a:p>
-          <a:pPr>
-            <a:defRPr sz="1000">
-              <a:solidFill>
-                <a:schemeClr val="tx1"/>
-              </a:solidFill>
-              <a:latin typeface="+mn-lt"/>
-              <a:ea typeface="+mn-ea"/>
-            </a:defRPr>
-          </a:pPr>
-          <a:endParaRPr lang="ja-JP"/>
-        </a:p>
-      </c:txPr>
-    </c:legend>
     <c:plotVisOnly val="1"/>
     <c:dispBlanksAs val="gap"/>
   </c:chart>
@@ -646,7 +809,7 @@
     <a:lstStyle/>
     <a:p>
       <a:pPr>
-        <a:defRPr sz="1000">
+        <a:defRPr sz="1100">
           <a:solidFill>
             <a:schemeClr val="tx1"/>
           </a:solidFill>
@@ -717,6 +880,31 @@
               </a:ln>
             </c:spPr>
           </c:dPt>
+          <c:dLbls>
+            <c:txPr>
+              <a:bodyPr/>
+              <a:lstStyle/>
+              <a:p>
+                <a:pPr>
+                  <a:defRPr sz="1100">
+                    <a:solidFill>
+                      <a:schemeClr val="tx1"/>
+                    </a:solidFill>
+                    <a:latin typeface="+mn-lt"/>
+                    <a:ea typeface="+mn-ea"/>
+                  </a:defRPr>
+                </a:pPr>
+                <a:endParaRPr lang="ja-JP"/>
+              </a:p>
+            </c:txPr>
+            <c:dLblPos val="outEnd"/>
+            <c:showLegendKey val="0"/>
+            <c:showVal val="1"/>
+            <c:showCatName val="0"/>
+            <c:showSerName val="0"/>
+            <c:showPercent val="0"/>
+            <c:showBubbleSize val="0"/>
+          </c:dLbls>
           <c:cat>
             <c:strRef>
               <c:f>Sheet1!$A$2:$A$5</c:f>
@@ -785,6 +973,31 @@
             </a:ln>
           </c:spPr>
           <c:invertIfNegative val="0"/>
+          <c:dLbls>
+            <c:txPr>
+              <a:bodyPr/>
+              <a:lstStyle/>
+              <a:p>
+                <a:pPr>
+                  <a:defRPr sz="1100">
+                    <a:solidFill>
+                      <a:schemeClr val="tx1"/>
+                    </a:solidFill>
+                    <a:latin typeface="+mn-lt"/>
+                    <a:ea typeface="+mn-ea"/>
+                  </a:defRPr>
+                </a:pPr>
+                <a:endParaRPr lang="ja-JP"/>
+              </a:p>
+            </c:txPr>
+            <c:dLblPos val="outEnd"/>
+            <c:showLegendKey val="0"/>
+            <c:showVal val="1"/>
+            <c:showCatName val="0"/>
+            <c:showSerName val="0"/>
+            <c:showPercent val="0"/>
+            <c:showBubbleSize val="0"/>
+          </c:dLbls>
           <c:cat>
             <c:strRef>
               <c:f>Sheet1!$A$2:$A$5</c:f>
@@ -855,7 +1068,7 @@
           <a:lstStyle/>
           <a:p>
             <a:pPr>
-              <a:defRPr sz="1000">
+              <a:defRPr sz="1100">
                 <a:solidFill>
                   <a:schemeClr val="tx2"/>
                 </a:solidFill>
@@ -876,16 +1089,15 @@
         <c:axId val="1002"/>
         <c:scaling>
           <c:orientation val="minMax"/>
+          <c:min val="0"/>
         </c:scaling>
-        <c:delete val="0"/>
+        <c:delete val="1"/>
         <c:axPos val="l"/>
         <c:majorGridlines>
           <c:spPr>
             <a:ln w="6350">
               <a:solidFill>
-                <a:schemeClr val="bg2">
-                  <a:lumMod val="90000"/>
-                </a:schemeClr>
+                <a:schemeClr val="accent5"/>
               </a:solidFill>
             </a:ln>
           </c:spPr>
@@ -904,7 +1116,7 @@
           <a:lstStyle/>
           <a:p>
             <a:pPr>
-              <a:defRPr sz="1000">
+              <a:defRPr sz="1100">
                 <a:solidFill>
                   <a:schemeClr val="tx2"/>
                 </a:solidFill>
@@ -928,7 +1140,7 @@
         <a:lstStyle/>
         <a:p>
           <a:pPr>
-            <a:defRPr sz="1000">
+            <a:defRPr sz="1100">
               <a:solidFill>
                 <a:schemeClr val="tx1"/>
               </a:solidFill>
@@ -954,7 +1166,7 @@
     <a:lstStyle/>
     <a:p>
       <a:pPr>
-        <a:defRPr sz="1000">
+        <a:defRPr sz="1100">
           <a:solidFill>
             <a:schemeClr val="tx1"/>
           </a:solidFill>
@@ -969,6 +1181,2027 @@
     <c:autoUpdate val="0"/>
   </c:externalData>
 </c:chartSpace>
+</file>
+
+<file path=ppt/charts/chart4.xml><?xml version="1.0" encoding="utf-8"?>
+<c:chartSpace xmlns:c="http://schemas.openxmlformats.org/drawingml/2006/chart" xmlns:a="http://schemas.openxmlformats.org/drawingml/2006/main" xmlns:r="http://schemas.openxmlformats.org/officeDocument/2006/relationships">
+  <c:date1904 val="0"/>
+  <c:lang val="ja-JP"/>
+  <c:roundedCorners val="0"/>
+  <c:chart>
+    <c:autoTitleDeleted val="1"/>
+    <c:plotArea>
+      <c:layout/>
+      <c:barChart>
+        <c:barDir val="bar"/>
+        <c:grouping val="percentStacked"/>
+        <c:varyColors val="0"/>
+        <c:ser>
+          <c:idx val="0"/>
+          <c:order val="0"/>
+          <c:tx>
+            <c:strRef>
+              <c:f>Sheet1!$B$1</c:f>
+              <c:strCache>
+                <c:ptCount val="1"/>
+                <c:pt idx="0">
+                  <c:v>検索</c:v>
+                </c:pt>
+              </c:strCache>
+            </c:strRef>
+          </c:tx>
+          <c:dLbls>
+            <c:txPr>
+              <a:bodyPr/>
+              <a:lstStyle/>
+              <a:p>
+                <a:pPr>
+                  <a:defRPr sz="1100">
+                    <a:solidFill>
+                      <a:schemeClr val="lt1"/>
+                    </a:solidFill>
+                    <a:latin typeface="+mn-lt"/>
+                    <a:ea typeface="+mn-ea"/>
+                  </a:defRPr>
+                </a:pPr>
+                <a:endParaRPr lang="ja-JP"/>
+              </a:p>
+            </c:txPr>
+            <c:dLblPos val="ctr"/>
+            <c:showLegendKey val="0"/>
+            <c:showVal val="1"/>
+            <c:showCatName val="0"/>
+            <c:showSerName val="0"/>
+            <c:showPercent val="0"/>
+            <c:showBubbleSize val="0"/>
+          </c:dLbls>
+          <c:cat>
+            <c:strRef>
+              <c:f>Sheet1!$A$2:$A$2</c:f>
+              <c:strCache>
+                <c:ptCount val="1"/>
+                <c:pt idx="0">
+                  <c:v>2026/09</c:v>
+                </c:pt>
+              </c:strCache>
+            </c:strRef>
+          </c:cat>
+          <c:val>
+            <c:numRef>
+              <c:f>Sheet1!$B$2:$B$2</c:f>
+              <c:numCache>
+                <c:formatCode>0%</c:formatCode>
+                <c:ptCount val="1"/>
+                <c:pt idx="0">
+                  <c:v>0.58</c:v>
+                </c:pt>
+              </c:numCache>
+            </c:numRef>
+          </c:val>
+        </c:ser>
+        <c:ser>
+          <c:idx val="1"/>
+          <c:order val="1"/>
+          <c:tx>
+            <c:strRef>
+              <c:f>Sheet1!$C$1</c:f>
+              <c:strCache>
+                <c:ptCount val="1"/>
+                <c:pt idx="0">
+                  <c:v>SNS</c:v>
+                </c:pt>
+              </c:strCache>
+            </c:strRef>
+          </c:tx>
+          <c:dLbls>
+            <c:txPr>
+              <a:bodyPr/>
+              <a:lstStyle/>
+              <a:p>
+                <a:pPr>
+                  <a:defRPr sz="1100">
+                    <a:solidFill>
+                      <a:schemeClr val="tx1"/>
+                    </a:solidFill>
+                    <a:latin typeface="+mn-lt"/>
+                    <a:ea typeface="+mn-ea"/>
+                  </a:defRPr>
+                </a:pPr>
+                <a:endParaRPr lang="ja-JP"/>
+              </a:p>
+            </c:txPr>
+            <c:dLblPos val="ctr"/>
+            <c:showLegendKey val="0"/>
+            <c:showVal val="1"/>
+            <c:showCatName val="0"/>
+            <c:showSerName val="0"/>
+            <c:showPercent val="0"/>
+            <c:showBubbleSize val="0"/>
+          </c:dLbls>
+          <c:cat>
+            <c:strRef>
+              <c:f>Sheet1!$A$2:$A$2</c:f>
+              <c:strCache>
+                <c:ptCount val="1"/>
+                <c:pt idx="0">
+                  <c:v>2026/09</c:v>
+                </c:pt>
+              </c:strCache>
+            </c:strRef>
+          </c:cat>
+          <c:val>
+            <c:numRef>
+              <c:f>Sheet1!$C$2:$C$2</c:f>
+              <c:numCache>
+                <c:formatCode>0%</c:formatCode>
+                <c:ptCount val="1"/>
+                <c:pt idx="0">
+                  <c:v>0.21</c:v>
+                </c:pt>
+              </c:numCache>
+            </c:numRef>
+          </c:val>
+        </c:ser>
+        <c:ser>
+          <c:idx val="2"/>
+          <c:order val="2"/>
+          <c:tx>
+            <c:strRef>
+              <c:f>Sheet1!$D$1</c:f>
+              <c:strCache>
+                <c:ptCount val="1"/>
+                <c:pt idx="0">
+                  <c:v>note 内</c:v>
+                </c:pt>
+              </c:strCache>
+            </c:strRef>
+          </c:tx>
+          <c:dLbls>
+            <c:txPr>
+              <a:bodyPr/>
+              <a:lstStyle/>
+              <a:p>
+                <a:pPr>
+                  <a:defRPr sz="1100">
+                    <a:solidFill>
+                      <a:schemeClr val="lt1"/>
+                    </a:solidFill>
+                    <a:latin typeface="+mn-lt"/>
+                    <a:ea typeface="+mn-ea"/>
+                  </a:defRPr>
+                </a:pPr>
+                <a:endParaRPr lang="ja-JP"/>
+              </a:p>
+            </c:txPr>
+            <c:dLblPos val="ctr"/>
+            <c:showLegendKey val="0"/>
+            <c:showVal val="1"/>
+            <c:showCatName val="0"/>
+            <c:showSerName val="0"/>
+            <c:showPercent val="0"/>
+            <c:showBubbleSize val="0"/>
+          </c:dLbls>
+          <c:cat>
+            <c:strRef>
+              <c:f>Sheet1!$A$2:$A$2</c:f>
+              <c:strCache>
+                <c:ptCount val="1"/>
+                <c:pt idx="0">
+                  <c:v>2026/09</c:v>
+                </c:pt>
+              </c:strCache>
+            </c:strRef>
+          </c:cat>
+          <c:val>
+            <c:numRef>
+              <c:f>Sheet1!$D$2:$D$2</c:f>
+              <c:numCache>
+                <c:formatCode>0%</c:formatCode>
+                <c:ptCount val="1"/>
+                <c:pt idx="0">
+                  <c:v>0.13</c:v>
+                </c:pt>
+              </c:numCache>
+            </c:numRef>
+          </c:val>
+        </c:ser>
+        <c:ser>
+          <c:idx val="3"/>
+          <c:order val="3"/>
+          <c:tx>
+            <c:strRef>
+              <c:f>Sheet1!$E$1</c:f>
+              <c:strCache>
+                <c:ptCount val="1"/>
+                <c:pt idx="0">
+                  <c:v>その他</c:v>
+                </c:pt>
+              </c:strCache>
+            </c:strRef>
+          </c:tx>
+          <c:dLbls>
+            <c:txPr>
+              <a:bodyPr/>
+              <a:lstStyle/>
+              <a:p>
+                <a:pPr>
+                  <a:defRPr sz="1100">
+                    <a:solidFill>
+                      <a:schemeClr val="tx1"/>
+                    </a:solidFill>
+                    <a:latin typeface="+mn-lt"/>
+                    <a:ea typeface="+mn-ea"/>
+                  </a:defRPr>
+                </a:pPr>
+                <a:endParaRPr lang="ja-JP"/>
+              </a:p>
+            </c:txPr>
+            <c:dLblPos val="ctr"/>
+            <c:showLegendKey val="0"/>
+            <c:showVal val="1"/>
+            <c:showCatName val="0"/>
+            <c:showSerName val="0"/>
+            <c:showPercent val="0"/>
+            <c:showBubbleSize val="0"/>
+          </c:dLbls>
+          <c:cat>
+            <c:strRef>
+              <c:f>Sheet1!$A$2:$A$2</c:f>
+              <c:strCache>
+                <c:ptCount val="1"/>
+                <c:pt idx="0">
+                  <c:v>2026/09</c:v>
+                </c:pt>
+              </c:strCache>
+            </c:strRef>
+          </c:cat>
+          <c:val>
+            <c:numRef>
+              <c:f>Sheet1!$E$2:$E$2</c:f>
+              <c:numCache>
+                <c:formatCode>0%</c:formatCode>
+                <c:ptCount val="1"/>
+                <c:pt idx="0">
+                  <c:v>0.08</c:v>
+                </c:pt>
+              </c:numCache>
+            </c:numRef>
+          </c:val>
+        </c:ser>
+        <c:gapWidth val="60"/>
+        <c:overlap val="100"/>
+        <c:axId val="1001"/>
+        <c:axId val="1002"/>
+      </c:barChart>
+      <c:catAx>
+        <c:axId val="1001"/>
+        <c:scaling>
+          <c:orientation val="minMax"/>
+        </c:scaling>
+        <c:delete val="0"/>
+        <c:axPos val="l"/>
+        <c:numFmt formatCode="General" sourceLinked="1"/>
+        <c:majorTickMark val="none"/>
+        <c:minorTickMark val="none"/>
+        <c:tickLblPos val="nextTo"/>
+        <c:spPr>
+          <a:ln w="9525">
+            <a:solidFill>
+              <a:schemeClr val="tx2"/>
+            </a:solidFill>
+          </a:ln>
+        </c:spPr>
+        <c:txPr>
+          <a:bodyPr/>
+          <a:lstStyle/>
+          <a:p>
+            <a:pPr>
+              <a:defRPr sz="1100">
+                <a:solidFill>
+                  <a:schemeClr val="tx2"/>
+                </a:solidFill>
+                <a:latin typeface="+mn-lt"/>
+                <a:ea typeface="+mn-ea"/>
+              </a:defRPr>
+            </a:pPr>
+            <a:endParaRPr lang="ja-JP"/>
+          </a:p>
+        </c:txPr>
+        <c:crossAx val="1002"/>
+        <c:crosses val="autoZero"/>
+        <c:auto val="1"/>
+        <c:lblAlgn val="ctr"/>
+        <c:lblOffset val="100"/>
+      </c:catAx>
+      <c:valAx>
+        <c:axId val="1002"/>
+        <c:scaling>
+          <c:orientation val="minMax"/>
+          <c:max val="1"/>
+          <c:min val="0"/>
+        </c:scaling>
+        <c:delete val="0"/>
+        <c:axPos val="b"/>
+        <c:numFmt formatCode="0%" sourceLinked="0"/>
+        <c:majorTickMark val="none"/>
+        <c:minorTickMark val="none"/>
+        <c:tickLblPos val="nextTo"/>
+        <c:spPr>
+          <a:ln>
+            <a:noFill/>
+          </a:ln>
+        </c:spPr>
+        <c:txPr>
+          <a:bodyPr/>
+          <a:lstStyle/>
+          <a:p>
+            <a:pPr>
+              <a:defRPr sz="1100">
+                <a:solidFill>
+                  <a:schemeClr val="tx2"/>
+                </a:solidFill>
+                <a:latin typeface="+mn-lt"/>
+                <a:ea typeface="+mn-ea"/>
+              </a:defRPr>
+            </a:pPr>
+            <a:endParaRPr lang="ja-JP"/>
+          </a:p>
+        </c:txPr>
+        <c:crossAx val="1001"/>
+        <c:crosses val="autoZero"/>
+        <c:crossBetween val="between"/>
+      </c:valAx>
+    </c:plotArea>
+    <c:legend>
+      <c:legendPos val="b"/>
+      <c:overlay val="0"/>
+      <c:txPr>
+        <a:bodyPr/>
+        <a:lstStyle/>
+        <a:p>
+          <a:pPr>
+            <a:defRPr sz="1100">
+              <a:solidFill>
+                <a:schemeClr val="tx1"/>
+              </a:solidFill>
+              <a:latin typeface="+mn-lt"/>
+              <a:ea typeface="+mn-ea"/>
+            </a:defRPr>
+          </a:pPr>
+          <a:endParaRPr lang="ja-JP"/>
+        </a:p>
+      </c:txPr>
+    </c:legend>
+    <c:plotVisOnly val="1"/>
+    <c:dispBlanksAs val="gap"/>
+  </c:chart>
+  <c:spPr>
+    <a:noFill/>
+    <a:ln>
+      <a:noFill/>
+    </a:ln>
+  </c:spPr>
+  <c:txPr>
+    <a:bodyPr/>
+    <a:lstStyle/>
+    <a:p>
+      <a:pPr>
+        <a:defRPr sz="1100">
+          <a:solidFill>
+            <a:schemeClr val="tx1"/>
+          </a:solidFill>
+          <a:latin typeface="+mn-lt"/>
+          <a:ea typeface="+mn-ea"/>
+        </a:defRPr>
+      </a:pPr>
+      <a:endParaRPr lang="ja-JP"/>
+    </a:p>
+  </c:txPr>
+  <c:externalData r:id="rId1">
+    <c:autoUpdate val="0"/>
+  </c:externalData>
+</c:chartSpace>
+</file>
+
+<file path=ppt/charts/chart5.xml><?xml version="1.0" encoding="utf-8"?>
+<c:chartSpace xmlns:c="http://schemas.openxmlformats.org/drawingml/2006/chart" xmlns:a="http://schemas.openxmlformats.org/drawingml/2006/main" xmlns:r="http://schemas.openxmlformats.org/officeDocument/2006/relationships">
+  <c:date1904 val="0"/>
+  <c:lang val="ja-JP"/>
+  <c:roundedCorners val="0"/>
+  <c:chart>
+    <c:autoTitleDeleted val="1"/>
+    <c:plotArea>
+      <c:layout/>
+      <c:barChart>
+        <c:barDir val="col"/>
+        <c:grouping val="clustered"/>
+        <c:varyColors val="0"/>
+        <c:ser>
+          <c:idx val="0"/>
+          <c:order val="0"/>
+          <c:tx>
+            <c:strRef>
+              <c:f>Sheet1!$B$1</c:f>
+              <c:strCache>
+                <c:ptCount val="1"/>
+                <c:pt idx="0">
+                  <c:v>セッション（件）</c:v>
+                </c:pt>
+              </c:strCache>
+            </c:strRef>
+          </c:tx>
+          <c:spPr>
+            <a:solidFill>
+              <a:schemeClr val="accent4"/>
+            </a:solidFill>
+            <a:ln>
+              <a:noFill/>
+            </a:ln>
+          </c:spPr>
+          <c:invertIfNegative val="0"/>
+          <c:cat>
+            <c:strRef>
+              <c:f>Sheet1!$A$2:$A$5</c:f>
+              <c:strCache>
+                <c:ptCount val="4"/>
+                <c:pt idx="0">
+                  <c:v>W35</c:v>
+                </c:pt>
+                <c:pt idx="1">
+                  <c:v>W36</c:v>
+                </c:pt>
+                <c:pt idx="2">
+                  <c:v>W37</c:v>
+                </c:pt>
+                <c:pt idx="3">
+                  <c:v>W38</c:v>
+                </c:pt>
+              </c:strCache>
+            </c:strRef>
+          </c:cat>
+          <c:val>
+            <c:numRef>
+              <c:f>Sheet1!$B$2:$B$5</c:f>
+              <c:numCache>
+                <c:formatCode>#,##0</c:formatCode>
+                <c:ptCount val="4"/>
+                <c:pt idx="0">
+                  <c:v>12480</c:v>
+                </c:pt>
+                <c:pt idx="1">
+                  <c:v>13102</c:v>
+                </c:pt>
+                <c:pt idx="2">
+                  <c:v>12955</c:v>
+                </c:pt>
+                <c:pt idx="3">
+                  <c:v>14230</c:v>
+                </c:pt>
+              </c:numCache>
+            </c:numRef>
+          </c:val>
+        </c:ser>
+        <c:gapWidth val="80"/>
+        <c:axId val="1001"/>
+        <c:axId val="1002"/>
+      </c:barChart>
+      <c:lineChart>
+        <c:grouping val="standard"/>
+        <c:varyColors val="0"/>
+        <c:ser>
+          <c:idx val="1"/>
+          <c:order val="1"/>
+          <c:tx>
+            <c:strRef>
+              <c:f>Sheet1!$C$1</c:f>
+              <c:strCache>
+                <c:ptCount val="1"/>
+                <c:pt idx="0">
+                  <c:v>CVR（%）</c:v>
+                </c:pt>
+              </c:strCache>
+            </c:strRef>
+          </c:tx>
+          <c:spPr>
+            <a:ln w="34925" cap="rnd">
+              <a:solidFill>
+                <a:schemeClr val="accent6"/>
+              </a:solidFill>
+              <a:round/>
+            </a:ln>
+          </c:spPr>
+          <c:marker>
+            <c:symbol val="circle"/>
+            <c:size val="6"/>
+          </c:marker>
+          <c:dLbls>
+            <c:dLbl>
+              <c:idx val="0"/>
+              <c:txPr>
+                <a:bodyPr/>
+                <a:lstStyle/>
+                <a:p>
+                  <a:pPr>
+                    <a:defRPr sz="1100">
+                      <a:solidFill>
+                        <a:schemeClr val="tx1"/>
+                      </a:solidFill>
+                      <a:latin typeface="+mn-lt"/>
+                      <a:ea typeface="+mn-ea"/>
+                    </a:defRPr>
+                  </a:pPr>
+                  <a:endParaRPr lang="ja-JP"/>
+                </a:p>
+              </c:txPr>
+              <c:dLblPos val="r"/>
+              <c:showLegendKey val="0"/>
+              <c:showVal val="1"/>
+              <c:showCatName val="0"/>
+              <c:showSerName val="0"/>
+              <c:showPercent val="0"/>
+              <c:showBubbleSize val="0"/>
+            </c:dLbl>
+            <c:dLbl>
+              <c:idx val="3"/>
+              <c:txPr>
+                <a:bodyPr/>
+                <a:lstStyle/>
+                <a:p>
+                  <a:pPr>
+                    <a:defRPr sz="1100">
+                      <a:solidFill>
+                        <a:schemeClr val="tx1"/>
+                      </a:solidFill>
+                      <a:latin typeface="+mn-lt"/>
+                      <a:ea typeface="+mn-ea"/>
+                    </a:defRPr>
+                  </a:pPr>
+                  <a:endParaRPr lang="ja-JP"/>
+                </a:p>
+              </c:txPr>
+              <c:dLblPos val="r"/>
+              <c:showLegendKey val="0"/>
+              <c:showVal val="1"/>
+              <c:showCatName val="0"/>
+              <c:showSerName val="1"/>
+              <c:showPercent val="0"/>
+              <c:showBubbleSize val="0"/>
+            </c:dLbl>
+            <c:showLegendKey val="0"/>
+            <c:showVal val="0"/>
+            <c:showCatName val="0"/>
+            <c:showSerName val="0"/>
+            <c:showPercent val="0"/>
+            <c:showBubbleSize val="0"/>
+          </c:dLbls>
+          <c:cat>
+            <c:strRef>
+              <c:f>Sheet1!$A$2:$A$5</c:f>
+              <c:strCache>
+                <c:ptCount val="4"/>
+                <c:pt idx="0">
+                  <c:v>W35</c:v>
+                </c:pt>
+                <c:pt idx="1">
+                  <c:v>W36</c:v>
+                </c:pt>
+                <c:pt idx="2">
+                  <c:v>W37</c:v>
+                </c:pt>
+                <c:pt idx="3">
+                  <c:v>W38</c:v>
+                </c:pt>
+              </c:strCache>
+            </c:strRef>
+          </c:cat>
+          <c:val>
+            <c:numRef>
+              <c:f>Sheet1!$C$2:$C$5</c:f>
+              <c:numCache>
+                <c:formatCode>0.0%</c:formatCode>
+                <c:ptCount val="4"/>
+                <c:pt idx="0">
+                  <c:v>0.021</c:v>
+                </c:pt>
+                <c:pt idx="1">
+                  <c:v>0.023</c:v>
+                </c:pt>
+                <c:pt idx="2">
+                  <c:v>0.024</c:v>
+                </c:pt>
+                <c:pt idx="3">
+                  <c:v>0.022</c:v>
+                </c:pt>
+              </c:numCache>
+            </c:numRef>
+          </c:val>
+          <c:smooth val="0"/>
+        </c:ser>
+        <c:marker val="1"/>
+        <c:axId val="1003"/>
+        <c:axId val="1004"/>
+      </c:lineChart>
+      <c:catAx>
+        <c:axId val="1001"/>
+        <c:scaling>
+          <c:orientation val="minMax"/>
+        </c:scaling>
+        <c:delete val="0"/>
+        <c:axPos val="b"/>
+        <c:numFmt formatCode="General" sourceLinked="1"/>
+        <c:majorTickMark val="none"/>
+        <c:minorTickMark val="none"/>
+        <c:tickLblPos val="nextTo"/>
+        <c:spPr>
+          <a:ln w="9525">
+            <a:solidFill>
+              <a:schemeClr val="tx2"/>
+            </a:solidFill>
+          </a:ln>
+        </c:spPr>
+        <c:txPr>
+          <a:bodyPr/>
+          <a:lstStyle/>
+          <a:p>
+            <a:pPr>
+              <a:defRPr sz="1100">
+                <a:solidFill>
+                  <a:schemeClr val="tx2"/>
+                </a:solidFill>
+                <a:latin typeface="+mn-lt"/>
+                <a:ea typeface="+mn-ea"/>
+              </a:defRPr>
+            </a:pPr>
+            <a:endParaRPr lang="ja-JP"/>
+          </a:p>
+        </c:txPr>
+        <c:crossAx val="1002"/>
+        <c:crosses val="autoZero"/>
+        <c:auto val="1"/>
+        <c:lblAlgn val="ctr"/>
+        <c:lblOffset val="100"/>
+      </c:catAx>
+      <c:valAx>
+        <c:axId val="1002"/>
+        <c:scaling>
+          <c:orientation val="minMax"/>
+          <c:min val="0"/>
+        </c:scaling>
+        <c:delete val="0"/>
+        <c:axPos val="l"/>
+        <c:majorGridlines>
+          <c:spPr>
+            <a:ln w="6350">
+              <a:solidFill>
+                <a:schemeClr val="accent5"/>
+              </a:solidFill>
+            </a:ln>
+          </c:spPr>
+        </c:majorGridlines>
+        <c:numFmt formatCode="#,##0" sourceLinked="0"/>
+        <c:majorTickMark val="none"/>
+        <c:minorTickMark val="none"/>
+        <c:tickLblPos val="nextTo"/>
+        <c:spPr>
+          <a:ln>
+            <a:noFill/>
+          </a:ln>
+        </c:spPr>
+        <c:txPr>
+          <a:bodyPr/>
+          <a:lstStyle/>
+          <a:p>
+            <a:pPr>
+              <a:defRPr sz="1100">
+                <a:solidFill>
+                  <a:schemeClr val="tx2"/>
+                </a:solidFill>
+                <a:latin typeface="+mn-lt"/>
+                <a:ea typeface="+mn-ea"/>
+              </a:defRPr>
+            </a:pPr>
+            <a:endParaRPr lang="ja-JP"/>
+          </a:p>
+        </c:txPr>
+        <c:crossAx val="1001"/>
+        <c:crosses val="autoZero"/>
+        <c:crossBetween val="between"/>
+      </c:valAx>
+      <c:valAx>
+        <c:axId val="1004"/>
+        <c:scaling>
+          <c:orientation val="minMax"/>
+        </c:scaling>
+        <c:delete val="0"/>
+        <c:axPos val="l"/>
+        <c:numFmt formatCode="0.0%" sourceLinked="0"/>
+        <c:majorTickMark val="none"/>
+        <c:minorTickMark val="none"/>
+        <c:tickLblPos val="nextTo"/>
+        <c:spPr>
+          <a:ln>
+            <a:noFill/>
+          </a:ln>
+        </c:spPr>
+        <c:txPr>
+          <a:bodyPr/>
+          <a:lstStyle/>
+          <a:p>
+            <a:pPr>
+              <a:defRPr sz="1100">
+                <a:solidFill>
+                  <a:schemeClr val="tx2"/>
+                </a:solidFill>
+                <a:latin typeface="+mn-lt"/>
+                <a:ea typeface="+mn-ea"/>
+              </a:defRPr>
+            </a:pPr>
+            <a:endParaRPr lang="ja-JP"/>
+          </a:p>
+        </c:txPr>
+        <c:crossAx val="1003"/>
+        <c:crosses val="max"/>
+        <c:crossBetween val="between"/>
+        <c:majorUnit val="0.005"/>
+      </c:valAx>
+      <c:catAx>
+        <c:axId val="1003"/>
+        <c:scaling>
+          <c:orientation val="minMax"/>
+        </c:scaling>
+        <c:delete val="1"/>
+        <c:axPos val="b"/>
+        <c:numFmt formatCode="General" sourceLinked="1"/>
+        <c:majorTickMark val="none"/>
+        <c:minorTickMark val="none"/>
+        <c:tickLblPos val="nextTo"/>
+        <c:spPr>
+          <a:ln w="9525">
+            <a:solidFill>
+              <a:schemeClr val="tx2"/>
+            </a:solidFill>
+          </a:ln>
+        </c:spPr>
+        <c:txPr>
+          <a:bodyPr/>
+          <a:lstStyle/>
+          <a:p>
+            <a:pPr>
+              <a:defRPr sz="1100">
+                <a:solidFill>
+                  <a:schemeClr val="tx2"/>
+                </a:solidFill>
+                <a:latin typeface="+mn-lt"/>
+                <a:ea typeface="+mn-ea"/>
+              </a:defRPr>
+            </a:pPr>
+            <a:endParaRPr lang="ja-JP"/>
+          </a:p>
+        </c:txPr>
+        <c:crossAx val="1004"/>
+        <c:crosses val="autoZero"/>
+        <c:auto val="1"/>
+        <c:lblAlgn val="ctr"/>
+        <c:lblOffset val="100"/>
+      </c:catAx>
+    </c:plotArea>
+    <c:plotVisOnly val="1"/>
+    <c:dispBlanksAs val="gap"/>
+  </c:chart>
+  <c:spPr>
+    <a:noFill/>
+    <a:ln>
+      <a:noFill/>
+    </a:ln>
+  </c:spPr>
+  <c:txPr>
+    <a:bodyPr/>
+    <a:lstStyle/>
+    <a:p>
+      <a:pPr>
+        <a:defRPr sz="1100">
+          <a:solidFill>
+            <a:schemeClr val="tx1"/>
+          </a:solidFill>
+          <a:latin typeface="+mn-lt"/>
+          <a:ea typeface="+mn-ea"/>
+        </a:defRPr>
+      </a:pPr>
+      <a:endParaRPr lang="ja-JP"/>
+    </a:p>
+  </c:txPr>
+  <c:externalData r:id="rId1">
+    <c:autoUpdate val="0"/>
+  </c:externalData>
+</c:chartSpace>
+</file>
+
+<file path=ppt/charts/chart6.xml><?xml version="1.0" encoding="utf-8"?>
+<c:chartSpace xmlns:c="http://schemas.openxmlformats.org/drawingml/2006/chart" xmlns:a="http://schemas.openxmlformats.org/drawingml/2006/main" xmlns:r="http://schemas.openxmlformats.org/officeDocument/2006/relationships">
+  <c:date1904 val="0"/>
+  <c:lang val="ja-JP"/>
+  <c:roundedCorners val="0"/>
+  <c:chart>
+    <c:autoTitleDeleted val="1"/>
+    <c:plotArea>
+      <c:layout/>
+      <c:barChart>
+        <c:barDir val="bar"/>
+        <c:grouping val="clustered"/>
+        <c:varyColors val="0"/>
+        <c:ser>
+          <c:idx val="0"/>
+          <c:order val="0"/>
+          <c:tx>
+            <c:strRef>
+              <c:f>Sheet1!$B$1</c:f>
+              <c:strCache>
+                <c:ptCount val="1"/>
+                <c:pt idx="0">
+                  <c:v>前年</c:v>
+                </c:pt>
+              </c:strCache>
+            </c:strRef>
+          </c:tx>
+          <c:spPr>
+            <a:solidFill>
+              <a:schemeClr val="accent4"/>
+            </a:solidFill>
+            <a:ln>
+              <a:noFill/>
+            </a:ln>
+          </c:spPr>
+          <c:invertIfNegative val="0"/>
+          <c:dLbls>
+            <c:txPr>
+              <a:bodyPr/>
+              <a:lstStyle/>
+              <a:p>
+                <a:pPr>
+                  <a:defRPr sz="1100">
+                    <a:solidFill>
+                      <a:schemeClr val="tx1"/>
+                    </a:solidFill>
+                    <a:latin typeface="+mn-lt"/>
+                    <a:ea typeface="+mn-ea"/>
+                  </a:defRPr>
+                </a:pPr>
+                <a:endParaRPr lang="ja-JP"/>
+              </a:p>
+            </c:txPr>
+            <c:dLblPos val="outEnd"/>
+            <c:showLegendKey val="0"/>
+            <c:showVal val="1"/>
+            <c:showCatName val="0"/>
+            <c:showSerName val="0"/>
+            <c:showPercent val="0"/>
+            <c:showBubbleSize val="0"/>
+          </c:dLbls>
+          <c:cat>
+            <c:strRef>
+              <c:f>Sheet1!$A$2:$A$5</c:f>
+              <c:strCache>
+                <c:ptCount val="4"/>
+                <c:pt idx="0">
+                  <c:v>検索</c:v>
+                </c:pt>
+                <c:pt idx="1">
+                  <c:v>SNS</c:v>
+                </c:pt>
+                <c:pt idx="2">
+                  <c:v>内部リンク</c:v>
+                </c:pt>
+                <c:pt idx="3">
+                  <c:v>その他</c:v>
+                </c:pt>
+              </c:strCache>
+            </c:strRef>
+          </c:cat>
+          <c:val>
+            <c:numRef>
+              <c:f>Sheet1!$B$2:$B$5</c:f>
+              <c:numCache>
+                <c:formatCode>#,##0</c:formatCode>
+                <c:ptCount val="4"/>
+                <c:pt idx="0">
+                  <c:v>2140</c:v>
+                </c:pt>
+                <c:pt idx="1">
+                  <c:v>1280</c:v>
+                </c:pt>
+                <c:pt idx="2">
+                  <c:v>640</c:v>
+                </c:pt>
+                <c:pt idx="3">
+                  <c:v>320</c:v>
+                </c:pt>
+              </c:numCache>
+            </c:numRef>
+          </c:val>
+        </c:ser>
+        <c:ser>
+          <c:idx val="1"/>
+          <c:order val="1"/>
+          <c:tx>
+            <c:strRef>
+              <c:f>Sheet1!$C$1</c:f>
+              <c:strCache>
+                <c:ptCount val="1"/>
+                <c:pt idx="0">
+                  <c:v>今年</c:v>
+                </c:pt>
+              </c:strCache>
+            </c:strRef>
+          </c:tx>
+          <c:spPr>
+            <a:solidFill>
+              <a:schemeClr val="accent1"/>
+            </a:solidFill>
+            <a:ln>
+              <a:noFill/>
+            </a:ln>
+          </c:spPr>
+          <c:invertIfNegative val="0"/>
+          <c:dLbls>
+            <c:txPr>
+              <a:bodyPr/>
+              <a:lstStyle/>
+              <a:p>
+                <a:pPr>
+                  <a:defRPr sz="1100">
+                    <a:solidFill>
+                      <a:schemeClr val="tx1"/>
+                    </a:solidFill>
+                    <a:latin typeface="+mn-lt"/>
+                    <a:ea typeface="+mn-ea"/>
+                  </a:defRPr>
+                </a:pPr>
+                <a:endParaRPr lang="ja-JP"/>
+              </a:p>
+            </c:txPr>
+            <c:dLblPos val="outEnd"/>
+            <c:showLegendKey val="0"/>
+            <c:showVal val="1"/>
+            <c:showCatName val="0"/>
+            <c:showSerName val="0"/>
+            <c:showPercent val="0"/>
+            <c:showBubbleSize val="0"/>
+          </c:dLbls>
+          <c:cat>
+            <c:strRef>
+              <c:f>Sheet1!$A$2:$A$5</c:f>
+              <c:strCache>
+                <c:ptCount val="4"/>
+                <c:pt idx="0">
+                  <c:v>検索</c:v>
+                </c:pt>
+                <c:pt idx="1">
+                  <c:v>SNS</c:v>
+                </c:pt>
+                <c:pt idx="2">
+                  <c:v>内部リンク</c:v>
+                </c:pt>
+                <c:pt idx="3">
+                  <c:v>その他</c:v>
+                </c:pt>
+              </c:strCache>
+            </c:strRef>
+          </c:cat>
+          <c:val>
+            <c:numRef>
+              <c:f>Sheet1!$C$2:$C$5</c:f>
+              <c:numCache>
+                <c:formatCode>#,##0</c:formatCode>
+                <c:ptCount val="4"/>
+                <c:pt idx="0">
+                  <c:v>3480</c:v>
+                </c:pt>
+                <c:pt idx="1">
+                  <c:v>1020</c:v>
+                </c:pt>
+                <c:pt idx="2">
+                  <c:v>980</c:v>
+                </c:pt>
+                <c:pt idx="3">
+                  <c:v>410</c:v>
+                </c:pt>
+              </c:numCache>
+            </c:numRef>
+          </c:val>
+        </c:ser>
+        <c:gapWidth val="60"/>
+        <c:overlap val="-10"/>
+        <c:axId val="1001"/>
+        <c:axId val="1002"/>
+      </c:barChart>
+      <c:catAx>
+        <c:axId val="1001"/>
+        <c:scaling>
+          <c:orientation val="maxMin"/>
+        </c:scaling>
+        <c:delete val="0"/>
+        <c:axPos val="l"/>
+        <c:numFmt formatCode="General" sourceLinked="1"/>
+        <c:majorTickMark val="none"/>
+        <c:minorTickMark val="none"/>
+        <c:tickLblPos val="nextTo"/>
+        <c:spPr>
+          <a:ln w="9525">
+            <a:solidFill>
+              <a:schemeClr val="tx2"/>
+            </a:solidFill>
+          </a:ln>
+        </c:spPr>
+        <c:txPr>
+          <a:bodyPr/>
+          <a:lstStyle/>
+          <a:p>
+            <a:pPr>
+              <a:defRPr sz="1100">
+                <a:solidFill>
+                  <a:schemeClr val="tx2"/>
+                </a:solidFill>
+                <a:latin typeface="+mn-lt"/>
+                <a:ea typeface="+mn-ea"/>
+              </a:defRPr>
+            </a:pPr>
+            <a:endParaRPr lang="ja-JP"/>
+          </a:p>
+        </c:txPr>
+        <c:crossAx val="1002"/>
+        <c:crosses val="autoZero"/>
+        <c:auto val="1"/>
+        <c:lblAlgn val="ctr"/>
+        <c:lblOffset val="100"/>
+      </c:catAx>
+      <c:valAx>
+        <c:axId val="1002"/>
+        <c:scaling>
+          <c:orientation val="minMax"/>
+          <c:min val="0"/>
+        </c:scaling>
+        <c:delete val="1"/>
+        <c:axPos val="b"/>
+        <c:numFmt formatCode="#,##0" sourceLinked="0"/>
+        <c:majorTickMark val="none"/>
+        <c:minorTickMark val="none"/>
+        <c:tickLblPos val="nextTo"/>
+        <c:spPr>
+          <a:ln>
+            <a:noFill/>
+          </a:ln>
+        </c:spPr>
+        <c:txPr>
+          <a:bodyPr/>
+          <a:lstStyle/>
+          <a:p>
+            <a:pPr>
+              <a:defRPr sz="1100">
+                <a:solidFill>
+                  <a:schemeClr val="tx2"/>
+                </a:solidFill>
+                <a:latin typeface="+mn-lt"/>
+                <a:ea typeface="+mn-ea"/>
+              </a:defRPr>
+            </a:pPr>
+            <a:endParaRPr lang="ja-JP"/>
+          </a:p>
+        </c:txPr>
+        <c:crossAx val="1001"/>
+        <c:crosses val="max"/>
+        <c:crossBetween val="between"/>
+      </c:valAx>
+    </c:plotArea>
+    <c:legend>
+      <c:legendPos val="b"/>
+      <c:overlay val="0"/>
+      <c:txPr>
+        <a:bodyPr/>
+        <a:lstStyle/>
+        <a:p>
+          <a:pPr>
+            <a:defRPr sz="1100">
+              <a:solidFill>
+                <a:schemeClr val="tx1"/>
+              </a:solidFill>
+              <a:latin typeface="+mn-lt"/>
+              <a:ea typeface="+mn-ea"/>
+            </a:defRPr>
+          </a:pPr>
+          <a:endParaRPr lang="ja-JP"/>
+        </a:p>
+      </c:txPr>
+    </c:legend>
+    <c:plotVisOnly val="1"/>
+    <c:dispBlanksAs val="gap"/>
+  </c:chart>
+  <c:spPr>
+    <a:noFill/>
+    <a:ln>
+      <a:noFill/>
+    </a:ln>
+  </c:spPr>
+  <c:txPr>
+    <a:bodyPr/>
+    <a:lstStyle/>
+    <a:p>
+      <a:pPr>
+        <a:defRPr sz="1100">
+          <a:solidFill>
+            <a:schemeClr val="tx1"/>
+          </a:solidFill>
+          <a:latin typeface="+mn-lt"/>
+          <a:ea typeface="+mn-ea"/>
+        </a:defRPr>
+      </a:pPr>
+      <a:endParaRPr lang="ja-JP"/>
+    </a:p>
+  </c:txPr>
+  <c:externalData r:id="rId1">
+    <c:autoUpdate val="0"/>
+  </c:externalData>
+</c:chartSpace>
+</file>
+
+<file path=ppt/charts/chart7.xml><?xml version="1.0" encoding="utf-8"?>
+<cx:chartSpace xmlns:cx="http://schemas.microsoft.com/office/drawing/2014/chartex" xmlns:a="http://schemas.openxmlformats.org/drawingml/2006/main" xmlns:r="http://schemas.openxmlformats.org/officeDocument/2006/relationships">
+  <cx:chartData>
+    <cx:externalData r:id="rId1" cx:autoUpdate="0"/>
+    <cx:data id="0">
+      <cx:strDim type="cat">
+        <cx:f>Sheet1!$A$2:$A$7</cx:f>
+        <cx:lvl ptCount="6">
+          <cx:pt idx="0">8月</cx:pt>
+          <cx:pt idx="1">検索</cx:pt>
+          <cx:pt idx="2">その他</cx:pt>
+          <cx:pt idx="3">内部リンク</cx:pt>
+          <cx:pt idx="4">SNS</cx:pt>
+          <cx:pt idx="5">9月</cx:pt>
+        </cx:lvl>
+      </cx:strDim>
+      <cx:numDim type="val">
+        <cx:f>Sheet1!$B$2:$B$7</cx:f>
+        <cx:lvl ptCount="6" formatCode="#,##0">
+          <cx:pt idx="0">12480</cx:pt>
+          <cx:pt idx="1">1340</cx:pt>
+          <cx:pt idx="2">690</cx:pt>
+          <cx:pt idx="3">340</cx:pt>
+          <cx:pt idx="4">-620</cx:pt>
+          <cx:pt idx="5">14230</cx:pt>
+        </cx:lvl>
+      </cx:numDim>
+    </cx:data>
+  </cx:chartData>
+  <cx:chart>
+    <cx:plotArea>
+      <cx:plotAreaRegion>
+        <cx:series layoutId="waterfall" uniqueId="{00000000-1111-2222-3333-444444444444}">
+          <cx:tx>
+            <cx:txData>
+              <cx:f>Sheet1!$B$1</cx:f>
+              <cx:v>増減</cx:v>
+            </cx:txData>
+          </cx:tx>
+          <cx:dataLabels pos="outEnd">
+            <cx:txPr>
+              <a:bodyPr/>
+              <a:lstStyle/>
+              <a:p>
+                <a:pPr>
+                  <a:defRPr sz="1100">
+                    <a:solidFill>
+                      <a:schemeClr val="tx1"/>
+                    </a:solidFill>
+                    <a:latin typeface="+mn-lt"/>
+                    <a:ea typeface="+mn-ea"/>
+                  </a:defRPr>
+                </a:pPr>
+              </a:p>
+            </cx:txPr>
+            <cx:visibility seriesName="0" categoryName="0" value="1"/>
+          </cx:dataLabels>
+          <cx:dataId val="0"/>
+          <cx:layoutPr>
+            <cx:subtotals>
+              <cx:idx val="0"/>
+              <cx:idx val="5"/>
+            </cx:subtotals>
+          </cx:layoutPr>
+        </cx:series>
+      </cx:plotAreaRegion>
+      <cx:axis id="0">
+        <cx:catScaling gapWidth="0.5"/>
+        <cx:tickLabels/>
+        <cx:txPr>
+          <a:bodyPr/>
+          <a:lstStyle/>
+          <a:p>
+            <a:pPr>
+              <a:defRPr sz="1100">
+                <a:solidFill>
+                  <a:schemeClr val="tx1"/>
+                </a:solidFill>
+                <a:latin typeface="+mn-lt"/>
+                <a:ea typeface="+mn-ea"/>
+              </a:defRPr>
+            </a:pPr>
+          </a:p>
+        </cx:txPr>
+      </cx:axis>
+      <cx:axis id="1">
+        <cx:valScaling/>
+        <cx:majorGridlines/>
+        <cx:tickLabels/>
+        <cx:txPr>
+          <a:bodyPr/>
+          <a:lstStyle/>
+          <a:p>
+            <a:pPr>
+              <a:defRPr sz="1100">
+                <a:solidFill>
+                  <a:schemeClr val="tx1"/>
+                </a:solidFill>
+                <a:latin typeface="+mn-lt"/>
+                <a:ea typeface="+mn-ea"/>
+              </a:defRPr>
+            </a:pPr>
+          </a:p>
+        </cx:txPr>
+      </cx:axis>
+    </cx:plotArea>
+  </cx:chart>
+  <cx:spPr>
+    <a:noFill/>
+    <a:ln>
+      <a:noFill/>
+    </a:ln>
+  </cx:spPr>
+</cx:chartSpace>
+</file>
+
+<file path=ppt/charts/chart8.xml><?xml version="1.0" encoding="utf-8"?>
+<c:chartSpace xmlns:c="http://schemas.openxmlformats.org/drawingml/2006/chart" xmlns:a="http://schemas.openxmlformats.org/drawingml/2006/main" xmlns:r="http://schemas.openxmlformats.org/officeDocument/2006/relationships">
+  <c:date1904 val="0"/>
+  <c:lang val="ja-JP"/>
+  <c:roundedCorners val="0"/>
+  <c:chart>
+    <c:autoTitleDeleted val="1"/>
+    <c:plotArea>
+      <c:layout/>
+      <c:barChart>
+        <c:barDir val="col"/>
+        <c:grouping val="stacked"/>
+        <c:varyColors val="0"/>
+        <c:ser>
+          <c:idx val="0"/>
+          <c:order val="0"/>
+          <c:tx>
+            <c:strRef>
+              <c:f>Sheet1!$B$1</c:f>
+              <c:strCache>
+                <c:ptCount val="1"/>
+                <c:pt idx="0">
+                  <c:v>土台</c:v>
+                </c:pt>
+              </c:strCache>
+            </c:strRef>
+          </c:tx>
+          <c:spPr>
+            <a:noFill/>
+            <a:ln>
+              <a:noFill/>
+            </a:ln>
+          </c:spPr>
+          <c:invertIfNegative val="0"/>
+          <c:cat>
+            <c:strRef>
+              <c:f>Sheet1!$A$2:$A$7</c:f>
+              <c:strCache>
+                <c:ptCount val="6"/>
+                <c:pt idx="0">
+                  <c:v>8月</c:v>
+                </c:pt>
+                <c:pt idx="1">
+                  <c:v>検索</c:v>
+                </c:pt>
+                <c:pt idx="2">
+                  <c:v>その他</c:v>
+                </c:pt>
+                <c:pt idx="3">
+                  <c:v>内部リンク</c:v>
+                </c:pt>
+                <c:pt idx="4">
+                  <c:v>SNS</c:v>
+                </c:pt>
+                <c:pt idx="5">
+                  <c:v>9月</c:v>
+                </c:pt>
+              </c:strCache>
+            </c:strRef>
+          </c:cat>
+          <c:val>
+            <c:numRef>
+              <c:f>Sheet1!$B$2:$B$7</c:f>
+              <c:numCache>
+                <c:formatCode>#,##0</c:formatCode>
+                <c:ptCount val="6"/>
+                <c:pt idx="0">
+                  <c:v>0</c:v>
+                </c:pt>
+                <c:pt idx="1">
+                  <c:v>12480</c:v>
+                </c:pt>
+                <c:pt idx="2">
+                  <c:v>13820</c:v>
+                </c:pt>
+                <c:pt idx="3">
+                  <c:v>14510</c:v>
+                </c:pt>
+                <c:pt idx="4">
+                  <c:v>14230</c:v>
+                </c:pt>
+                <c:pt idx="5">
+                  <c:v>0</c:v>
+                </c:pt>
+              </c:numCache>
+            </c:numRef>
+          </c:val>
+        </c:ser>
+        <c:ser>
+          <c:idx val="1"/>
+          <c:order val="1"/>
+          <c:tx>
+            <c:strRef>
+              <c:f>Sheet1!$C$1</c:f>
+              <c:strCache>
+                <c:ptCount val="1"/>
+                <c:pt idx="0">
+                  <c:v>増加</c:v>
+                </c:pt>
+              </c:strCache>
+            </c:strRef>
+          </c:tx>
+          <c:spPr>
+            <a:solidFill>
+              <a:schemeClr val="accent1"/>
+            </a:solidFill>
+            <a:ln>
+              <a:noFill/>
+            </a:ln>
+          </c:spPr>
+          <c:invertIfNegative val="0"/>
+          <c:dLbls>
+            <c:txPr>
+              <a:bodyPr/>
+              <a:lstStyle/>
+              <a:p>
+                <a:pPr>
+                  <a:defRPr sz="1100">
+                    <a:solidFill>
+                      <a:schemeClr val="lt1"/>
+                    </a:solidFill>
+                    <a:latin typeface="+mn-lt"/>
+                    <a:ea typeface="+mn-ea"/>
+                  </a:defRPr>
+                </a:pPr>
+                <a:endParaRPr lang="ja-JP"/>
+              </a:p>
+            </c:txPr>
+            <c:dLblPos val="ctr"/>
+            <c:showLegendKey val="0"/>
+            <c:showVal val="1"/>
+            <c:showCatName val="0"/>
+            <c:showSerName val="0"/>
+            <c:showPercent val="0"/>
+            <c:showBubbleSize val="0"/>
+          </c:dLbls>
+          <c:cat>
+            <c:strRef>
+              <c:f>Sheet1!$A$2:$A$7</c:f>
+              <c:strCache>
+                <c:ptCount val="6"/>
+                <c:pt idx="0">
+                  <c:v>8月</c:v>
+                </c:pt>
+                <c:pt idx="1">
+                  <c:v>検索</c:v>
+                </c:pt>
+                <c:pt idx="2">
+                  <c:v>その他</c:v>
+                </c:pt>
+                <c:pt idx="3">
+                  <c:v>内部リンク</c:v>
+                </c:pt>
+                <c:pt idx="4">
+                  <c:v>SNS</c:v>
+                </c:pt>
+                <c:pt idx="5">
+                  <c:v>9月</c:v>
+                </c:pt>
+              </c:strCache>
+            </c:strRef>
+          </c:cat>
+          <c:val>
+            <c:numRef>
+              <c:f>Sheet1!$C$2:$C$7</c:f>
+              <c:numCache>
+                <c:formatCode>#,##0</c:formatCode>
+                <c:ptCount val="6"/>
+                <c:pt idx="1">
+                  <c:v>1340</c:v>
+                </c:pt>
+                <c:pt idx="2">
+                  <c:v>690</c:v>
+                </c:pt>
+                <c:pt idx="3">
+                  <c:v>340</c:v>
+                </c:pt>
+              </c:numCache>
+            </c:numRef>
+          </c:val>
+        </c:ser>
+        <c:ser>
+          <c:idx val="2"/>
+          <c:order val="2"/>
+          <c:tx>
+            <c:strRef>
+              <c:f>Sheet1!$D$1</c:f>
+              <c:strCache>
+                <c:ptCount val="1"/>
+                <c:pt idx="0">
+                  <c:v>減少</c:v>
+                </c:pt>
+              </c:strCache>
+            </c:strRef>
+          </c:tx>
+          <c:spPr>
+            <a:solidFill>
+              <a:schemeClr val="accent3"/>
+            </a:solidFill>
+            <a:ln>
+              <a:noFill/>
+            </a:ln>
+          </c:spPr>
+          <c:invertIfNegative val="0"/>
+          <c:dLbls>
+            <c:txPr>
+              <a:bodyPr/>
+              <a:lstStyle/>
+              <a:p>
+                <a:pPr>
+                  <a:defRPr sz="1100">
+                    <a:solidFill>
+                      <a:schemeClr val="lt1"/>
+                    </a:solidFill>
+                    <a:latin typeface="+mn-lt"/>
+                    <a:ea typeface="+mn-ea"/>
+                  </a:defRPr>
+                </a:pPr>
+                <a:endParaRPr lang="ja-JP"/>
+              </a:p>
+            </c:txPr>
+            <c:dLblPos val="ctr"/>
+            <c:showLegendKey val="0"/>
+            <c:showVal val="1"/>
+            <c:showCatName val="0"/>
+            <c:showSerName val="0"/>
+            <c:showPercent val="0"/>
+            <c:showBubbleSize val="0"/>
+          </c:dLbls>
+          <c:cat>
+            <c:strRef>
+              <c:f>Sheet1!$A$2:$A$7</c:f>
+              <c:strCache>
+                <c:ptCount val="6"/>
+                <c:pt idx="0">
+                  <c:v>8月</c:v>
+                </c:pt>
+                <c:pt idx="1">
+                  <c:v>検索</c:v>
+                </c:pt>
+                <c:pt idx="2">
+                  <c:v>その他</c:v>
+                </c:pt>
+                <c:pt idx="3">
+                  <c:v>内部リンク</c:v>
+                </c:pt>
+                <c:pt idx="4">
+                  <c:v>SNS</c:v>
+                </c:pt>
+                <c:pt idx="5">
+                  <c:v>9月</c:v>
+                </c:pt>
+              </c:strCache>
+            </c:strRef>
+          </c:cat>
+          <c:val>
+            <c:numRef>
+              <c:f>Sheet1!$D$2:$D$7</c:f>
+              <c:numCache>
+                <c:formatCode>#,##0</c:formatCode>
+                <c:ptCount val="6"/>
+                <c:pt idx="4">
+                  <c:v>620</c:v>
+                </c:pt>
+              </c:numCache>
+            </c:numRef>
+          </c:val>
+        </c:ser>
+        <c:ser>
+          <c:idx val="3"/>
+          <c:order val="3"/>
+          <c:tx>
+            <c:strRef>
+              <c:f>Sheet1!$E$1</c:f>
+              <c:strCache>
+                <c:ptCount val="1"/>
+                <c:pt idx="0">
+                  <c:v>合計</c:v>
+                </c:pt>
+              </c:strCache>
+            </c:strRef>
+          </c:tx>
+          <c:spPr>
+            <a:solidFill>
+              <a:schemeClr val="tx1"/>
+            </a:solidFill>
+            <a:ln>
+              <a:noFill/>
+            </a:ln>
+          </c:spPr>
+          <c:invertIfNegative val="0"/>
+          <c:dLbls>
+            <c:txPr>
+              <a:bodyPr/>
+              <a:lstStyle/>
+              <a:p>
+                <a:pPr>
+                  <a:defRPr sz="1100">
+                    <a:solidFill>
+                      <a:schemeClr val="lt1"/>
+                    </a:solidFill>
+                    <a:latin typeface="+mn-lt"/>
+                    <a:ea typeface="+mn-ea"/>
+                  </a:defRPr>
+                </a:pPr>
+                <a:endParaRPr lang="ja-JP"/>
+              </a:p>
+            </c:txPr>
+            <c:dLblPos val="ctr"/>
+            <c:showLegendKey val="0"/>
+            <c:showVal val="1"/>
+            <c:showCatName val="0"/>
+            <c:showSerName val="0"/>
+            <c:showPercent val="0"/>
+            <c:showBubbleSize val="0"/>
+          </c:dLbls>
+          <c:cat>
+            <c:strRef>
+              <c:f>Sheet1!$A$2:$A$7</c:f>
+              <c:strCache>
+                <c:ptCount val="6"/>
+                <c:pt idx="0">
+                  <c:v>8月</c:v>
+                </c:pt>
+                <c:pt idx="1">
+                  <c:v>検索</c:v>
+                </c:pt>
+                <c:pt idx="2">
+                  <c:v>その他</c:v>
+                </c:pt>
+                <c:pt idx="3">
+                  <c:v>内部リンク</c:v>
+                </c:pt>
+                <c:pt idx="4">
+                  <c:v>SNS</c:v>
+                </c:pt>
+                <c:pt idx="5">
+                  <c:v>9月</c:v>
+                </c:pt>
+              </c:strCache>
+            </c:strRef>
+          </c:cat>
+          <c:val>
+            <c:numRef>
+              <c:f>Sheet1!$E$2:$E$7</c:f>
+              <c:numCache>
+                <c:formatCode>#,##0</c:formatCode>
+                <c:ptCount val="6"/>
+                <c:pt idx="0">
+                  <c:v>12480</c:v>
+                </c:pt>
+                <c:pt idx="5">
+                  <c:v>14230</c:v>
+                </c:pt>
+              </c:numCache>
+            </c:numRef>
+          </c:val>
+        </c:ser>
+        <c:gapWidth val="60"/>
+        <c:overlap val="100"/>
+        <c:axId val="1001"/>
+        <c:axId val="1002"/>
+      </c:barChart>
+      <c:catAx>
+        <c:axId val="1001"/>
+        <c:scaling>
+          <c:orientation val="minMax"/>
+        </c:scaling>
+        <c:delete val="0"/>
+        <c:axPos val="b"/>
+        <c:numFmt formatCode="General" sourceLinked="1"/>
+        <c:majorTickMark val="none"/>
+        <c:minorTickMark val="none"/>
+        <c:tickLblPos val="nextTo"/>
+        <c:spPr>
+          <a:ln w="9525">
+            <a:solidFill>
+              <a:schemeClr val="tx2"/>
+            </a:solidFill>
+          </a:ln>
+        </c:spPr>
+        <c:txPr>
+          <a:bodyPr/>
+          <a:lstStyle/>
+          <a:p>
+            <a:pPr>
+              <a:defRPr sz="1100">
+                <a:solidFill>
+                  <a:schemeClr val="tx2"/>
+                </a:solidFill>
+                <a:latin typeface="+mn-lt"/>
+                <a:ea typeface="+mn-ea"/>
+              </a:defRPr>
+            </a:pPr>
+            <a:endParaRPr lang="ja-JP"/>
+          </a:p>
+        </c:txPr>
+        <c:crossAx val="1002"/>
+        <c:crosses val="autoZero"/>
+        <c:auto val="1"/>
+        <c:lblAlgn val="ctr"/>
+        <c:lblOffset val="100"/>
+      </c:catAx>
+      <c:valAx>
+        <c:axId val="1002"/>
+        <c:scaling>
+          <c:orientation val="minMax"/>
+          <c:min val="11000"/>
+        </c:scaling>
+        <c:delete val="1"/>
+        <c:axPos val="l"/>
+        <c:majorGridlines>
+          <c:spPr>
+            <a:ln w="6350">
+              <a:solidFill>
+                <a:schemeClr val="accent5"/>
+              </a:solidFill>
+            </a:ln>
+          </c:spPr>
+        </c:majorGridlines>
+        <c:numFmt formatCode="#,##0" sourceLinked="0"/>
+        <c:majorTickMark val="none"/>
+        <c:minorTickMark val="none"/>
+        <c:tickLblPos val="nextTo"/>
+        <c:spPr>
+          <a:ln>
+            <a:noFill/>
+          </a:ln>
+        </c:spPr>
+        <c:txPr>
+          <a:bodyPr/>
+          <a:lstStyle/>
+          <a:p>
+            <a:pPr>
+              <a:defRPr sz="1100">
+                <a:solidFill>
+                  <a:schemeClr val="tx2"/>
+                </a:solidFill>
+                <a:latin typeface="+mn-lt"/>
+                <a:ea typeface="+mn-ea"/>
+              </a:defRPr>
+            </a:pPr>
+            <a:endParaRPr lang="ja-JP"/>
+          </a:p>
+        </c:txPr>
+        <c:crossAx val="1001"/>
+        <c:crosses val="autoZero"/>
+        <c:crossBetween val="between"/>
+      </c:valAx>
+    </c:plotArea>
+    <c:plotVisOnly val="1"/>
+    <c:dispBlanksAs val="gap"/>
+  </c:chart>
+  <c:spPr>
+    <a:noFill/>
+    <a:ln>
+      <a:noFill/>
+    </a:ln>
+  </c:spPr>
+  <c:txPr>
+    <a:bodyPr/>
+    <a:lstStyle/>
+    <a:p>
+      <a:pPr>
+        <a:defRPr sz="1100">
+          <a:solidFill>
+            <a:schemeClr val="tx1"/>
+          </a:solidFill>
+          <a:latin typeface="+mn-lt"/>
+          <a:ea typeface="+mn-ea"/>
+        </a:defRPr>
+      </a:pPr>
+      <a:endParaRPr lang="ja-JP"/>
+    </a:p>
+  </c:txPr>
+  <c:externalData r:id="rId1">
+    <c:autoUpdate val="0"/>
+  </c:externalData>
+</c:chartSpace>
+</file>
+
+<file path=ppt/charts/colors7.xml><?xml version="1.0" encoding="utf-8"?>
+<cs:colorStyle xmlns:cs="http://schemas.microsoft.com/office/drawing/2012/chartStyle" xmlns:a="http://schemas.openxmlformats.org/drawingml/2006/main" meth="cycle" id="10">
+  <a:schemeClr val="accent1"/>
+  <a:schemeClr val="accent3"/>
+  <a:schemeClr val="tx1"/>
+  <a:schemeClr val="accent4"/>
+  <a:schemeClr val="accent5"/>
+  <a:schemeClr val="accent2"/>
+  <cs:variation/>
+  <cs:variation>
+    <a:lumMod val="60000"/>
+  </cs:variation>
+  <cs:variation>
+    <a:lumMod val="80000"/>
+    <a:lumOff val="20000"/>
+  </cs:variation>
+</cs:colorStyle>
+</file>
+
+<file path=ppt/charts/style7.xml><?xml version="1.0" encoding="utf-8"?>
+<cs:chartStyle xmlns:cs="http://schemas.microsoft.com/office/drawing/2012/chartStyle" xmlns:a="http://schemas.openxmlformats.org/drawingml/2006/main" id="201">
+  <cs:axisTitle>
+    <cs:lnRef idx="0"/>
+    <cs:fillRef idx="0"/>
+    <cs:effectRef idx="0"/>
+    <cs:fontRef idx="minor">
+      <a:schemeClr val="tx1"/>
+    </cs:fontRef>
+    <cs:defRPr/>
+  </cs:axisTitle>
+  <cs:categoryAxis>
+    <cs:lnRef idx="0"/>
+    <cs:fillRef idx="0"/>
+    <cs:effectRef idx="0"/>
+    <cs:fontRef idx="minor">
+      <a:schemeClr val="tx1"/>
+    </cs:fontRef>
+    <cs:defRPr/>
+  </cs:categoryAxis>
+  <cs:chartArea>
+    <cs:lnRef idx="0"/>
+    <cs:fillRef idx="0"/>
+    <cs:effectRef idx="0"/>
+    <cs:fontRef idx="minor">
+      <a:schemeClr val="tx1"/>
+    </cs:fontRef>
+  </cs:chartArea>
+  <cs:dataLabel>
+    <cs:lnRef idx="0"/>
+    <cs:fillRef idx="0"/>
+    <cs:effectRef idx="0"/>
+    <cs:fontRef idx="minor">
+      <a:schemeClr val="tx1"/>
+    </cs:fontRef>
+    <cs:defRPr/>
+  </cs:dataLabel>
+  <cs:dataLabelCallout>
+    <cs:lnRef idx="0"/>
+    <cs:fillRef idx="0"/>
+    <cs:effectRef idx="0"/>
+    <cs:fontRef idx="minor">
+      <a:schemeClr val="tx1"/>
+    </cs:fontRef>
+  </cs:dataLabelCallout>
+  <cs:dataPoint>
+    <cs:lnRef idx="0"/>
+    <cs:fillRef idx="1">
+      <cs:styleClr val="auto"/>
+    </cs:fillRef>
+    <cs:effectRef idx="0"/>
+    <cs:fontRef idx="minor">
+      <a:schemeClr val="tx1"/>
+    </cs:fontRef>
+  </cs:dataPoint>
+  <cs:dataPoint3D>
+    <cs:lnRef idx="0"/>
+    <cs:fillRef idx="1">
+      <cs:styleClr val="auto"/>
+    </cs:fillRef>
+    <cs:effectRef idx="0"/>
+    <cs:fontRef idx="minor">
+      <a:schemeClr val="tx1"/>
+    </cs:fontRef>
+  </cs:dataPoint3D>
+  <cs:dataPointLine>
+    <cs:lnRef idx="0"/>
+    <cs:fillRef idx="1">
+      <cs:styleClr val="auto"/>
+    </cs:fillRef>
+    <cs:effectRef idx="0"/>
+    <cs:fontRef idx="minor">
+      <a:schemeClr val="tx1"/>
+    </cs:fontRef>
+  </cs:dataPointLine>
+  <cs:dataPointMarker>
+    <cs:lnRef idx="0"/>
+    <cs:fillRef idx="1">
+      <cs:styleClr val="auto"/>
+    </cs:fillRef>
+    <cs:effectRef idx="0"/>
+    <cs:fontRef idx="minor">
+      <a:schemeClr val="tx1"/>
+    </cs:fontRef>
+  </cs:dataPointMarker>
+  <cs:dataPointWireframe>
+    <cs:lnRef idx="0"/>
+    <cs:fillRef idx="1">
+      <cs:styleClr val="auto"/>
+    </cs:fillRef>
+    <cs:effectRef idx="0"/>
+    <cs:fontRef idx="minor">
+      <a:schemeClr val="tx1"/>
+    </cs:fontRef>
+  </cs:dataPointWireframe>
+  <cs:dataTable>
+    <cs:lnRef idx="0"/>
+    <cs:fillRef idx="0"/>
+    <cs:effectRef idx="0"/>
+    <cs:fontRef idx="minor">
+      <a:schemeClr val="tx1"/>
+    </cs:fontRef>
+    <cs:defRPr/>
+  </cs:dataTable>
+  <cs:downBar>
+    <cs:lnRef idx="0"/>
+    <cs:fillRef idx="0"/>
+    <cs:effectRef idx="0"/>
+    <cs:fontRef idx="minor">
+      <a:schemeClr val="tx1"/>
+    </cs:fontRef>
+  </cs:downBar>
+  <cs:dropLine>
+    <cs:lnRef idx="0"/>
+    <cs:fillRef idx="0"/>
+    <cs:effectRef idx="0"/>
+    <cs:fontRef idx="minor">
+      <a:schemeClr val="tx1"/>
+    </cs:fontRef>
+  </cs:dropLine>
+  <cs:errorBar>
+    <cs:lnRef idx="0"/>
+    <cs:fillRef idx="0"/>
+    <cs:effectRef idx="0"/>
+    <cs:fontRef idx="minor">
+      <a:schemeClr val="tx1"/>
+    </cs:fontRef>
+  </cs:errorBar>
+  <cs:floor>
+    <cs:lnRef idx="0"/>
+    <cs:fillRef idx="0"/>
+    <cs:effectRef idx="0"/>
+    <cs:fontRef idx="minor">
+      <a:schemeClr val="tx1"/>
+    </cs:fontRef>
+  </cs:floor>
+  <cs:gridlineMajor>
+    <cs:lnRef idx="0"/>
+    <cs:fillRef idx="0"/>
+    <cs:effectRef idx="0"/>
+    <cs:fontRef idx="minor">
+      <a:schemeClr val="tx1"/>
+    </cs:fontRef>
+  </cs:gridlineMajor>
+  <cs:gridlineMinor>
+    <cs:lnRef idx="0"/>
+    <cs:fillRef idx="0"/>
+    <cs:effectRef idx="0"/>
+    <cs:fontRef idx="minor">
+      <a:schemeClr val="tx1"/>
+    </cs:fontRef>
+  </cs:gridlineMinor>
+  <cs:hiLoLine>
+    <cs:lnRef idx="0"/>
+    <cs:fillRef idx="0"/>
+    <cs:effectRef idx="0"/>
+    <cs:fontRef idx="minor">
+      <a:schemeClr val="tx1"/>
+    </cs:fontRef>
+  </cs:hiLoLine>
+  <cs:leaderLine>
+    <cs:lnRef idx="0"/>
+    <cs:fillRef idx="0"/>
+    <cs:effectRef idx="0"/>
+    <cs:fontRef idx="minor">
+      <a:schemeClr val="tx1"/>
+    </cs:fontRef>
+  </cs:leaderLine>
+  <cs:legend>
+    <cs:lnRef idx="0"/>
+    <cs:fillRef idx="0"/>
+    <cs:effectRef idx="0"/>
+    <cs:fontRef idx="minor">
+      <a:schemeClr val="tx1"/>
+    </cs:fontRef>
+    <cs:defRPr/>
+  </cs:legend>
+  <cs:plotArea>
+    <cs:lnRef idx="0"/>
+    <cs:fillRef idx="0"/>
+    <cs:effectRef idx="0"/>
+    <cs:fontRef idx="minor">
+      <a:schemeClr val="tx1"/>
+    </cs:fontRef>
+  </cs:plotArea>
+  <cs:plotArea3D>
+    <cs:lnRef idx="0"/>
+    <cs:fillRef idx="0"/>
+    <cs:effectRef idx="0"/>
+    <cs:fontRef idx="minor">
+      <a:schemeClr val="tx1"/>
+    </cs:fontRef>
+  </cs:plotArea3D>
+  <cs:seriesAxis>
+    <cs:lnRef idx="0"/>
+    <cs:fillRef idx="0"/>
+    <cs:effectRef idx="0"/>
+    <cs:fontRef idx="minor">
+      <a:schemeClr val="tx1"/>
+    </cs:fontRef>
+    <cs:defRPr/>
+  </cs:seriesAxis>
+  <cs:seriesLine>
+    <cs:lnRef idx="0"/>
+    <cs:fillRef idx="0"/>
+    <cs:effectRef idx="0"/>
+    <cs:fontRef idx="minor">
+      <a:schemeClr val="tx1"/>
+    </cs:fontRef>
+  </cs:seriesLine>
+  <cs:title>
+    <cs:lnRef idx="0"/>
+    <cs:fillRef idx="0"/>
+    <cs:effectRef idx="0"/>
+    <cs:fontRef idx="minor">
+      <a:schemeClr val="tx1"/>
+    </cs:fontRef>
+    <cs:defRPr/>
+  </cs:title>
+  <cs:trendline>
+    <cs:lnRef idx="0"/>
+    <cs:fillRef idx="0"/>
+    <cs:effectRef idx="0"/>
+    <cs:fontRef idx="minor">
+      <a:schemeClr val="tx1"/>
+    </cs:fontRef>
+  </cs:trendline>
+  <cs:trendlineLabel>
+    <cs:lnRef idx="0"/>
+    <cs:fillRef idx="0"/>
+    <cs:effectRef idx="0"/>
+    <cs:fontRef idx="minor">
+      <a:schemeClr val="tx1"/>
+    </cs:fontRef>
+    <cs:defRPr/>
+  </cs:trendlineLabel>
+  <cs:upBar>
+    <cs:lnRef idx="0"/>
+    <cs:fillRef idx="0"/>
+    <cs:effectRef idx="0"/>
+    <cs:fontRef idx="minor">
+      <a:schemeClr val="tx1"/>
+    </cs:fontRef>
+  </cs:upBar>
+  <cs:valueAxis>
+    <cs:lnRef idx="0"/>
+    <cs:fillRef idx="0"/>
+    <cs:effectRef idx="0"/>
+    <cs:fontRef idx="minor">
+      <a:schemeClr val="tx1"/>
+    </cs:fontRef>
+    <cs:defRPr/>
+  </cs:valueAxis>
+  <cs:wall>
+    <cs:lnRef idx="0"/>
+    <cs:fillRef idx="0"/>
+    <cs:effectRef idx="0"/>
+    <cs:fontRef idx="minor">
+      <a:schemeClr val="tx1"/>
+    </cs:fontRef>
+  </cs:wall>
+  <cs:dataPointMarkerLayout symbol="circle" size="5"/>
+</cs:chartStyle>
 </file>
 
 <file path=ppt/slideLayouts/slideLayout1.xml><?xml version="1.0" encoding="utf-8"?>
@@ -4527,7 +6760,7 @@
             <a:pPr lvl="0"/>
             <a:r>
               <a:rPr lang="ja-JP"/>
-              <a:t>ネイティブグラフ（graph3）。データはグラフ内の Excel と、横の report_charts.xlsx の data3 に同じものがある</a:t>
+              <a:t>データは data3（横の report_charts.xlsx が正）</a:t>
             </a:r>
           </a:p>
         </p:txBody>
@@ -4535,6 +6768,551 @@
       <p:graphicFrame>
         <p:nvGraphicFramePr>
           <p:cNvPr id="2" name="graph3"/>
+          <p:cNvGraphicFramePr/>
+          <p:nvPr/>
+        </p:nvGraphicFramePr>
+        <p:xfrm>
+          <a:off x="457200" y="1828800"/>
+          <a:ext cx="8229600" cy="2857500"/>
+        </p:xfrm>
+        <a:graphic>
+          <a:graphicData uri="http://schemas.openxmlformats.org/drawingml/2006/chart">
+            <c:chart xmlns:c="http://schemas.openxmlformats.org/drawingml/2006/chart" r:id="rId2"/>
+          </a:graphicData>
+        </a:graphic>
+      </p:graphicFrame>
+      <p:sp>
+        <p:nvSpPr>
+          <p:cNvPr id="5" name="SlideNumber"/>
+          <p:cNvSpPr>
+            <a:spLocks noGrp="1"/>
+          </p:cNvSpPr>
+          <p:nvPr>
+            <p:ph type="sldNum" sz="quarter" idx="12"/>
+          </p:nvPr>
+        </p:nvSpPr>
+        <p:spPr/>
+        <p:txBody>
+          <a:bodyPr/>
+          <a:lstStyle/>
+          <a:p>
+            <a:fld id="{B6F15528-21DE-4FAA-801E-634DDDAF4B2B}" type="slidenum">
+              <a:rPr lang="ja-JP"/>
+              <a:t>‹#›</a:t>
+            </a:fld>
+          </a:p>
+        </p:txBody>
+      </p:sp>
+    </p:spTree>
+  </p:cSld>
+  <p:clrMapOvr>
+    <a:masterClrMapping/>
+  </p:clrMapOvr>
+</p:sld>
+</file>
+
+<file path=ppt/slides/slide11.xml><?xml version="1.0" encoding="utf-8"?>
+<p:sld xmlns:a="http://schemas.openxmlformats.org/drawingml/2006/main" xmlns:r="http://schemas.openxmlformats.org/officeDocument/2006/relationships" xmlns:p="http://schemas.openxmlformats.org/presentationml/2006/main">
+  <p:cSld>
+    <p:spTree>
+      <p:nvGrpSpPr>
+        <p:cNvPr id="1" name=""/>
+        <p:cNvGrpSpPr/>
+        <p:nvPr/>
+      </p:nvGrpSpPr>
+      <p:grpSpPr>
+        <a:xfrm>
+          <a:off x="0" y="0"/>
+          <a:ext cx="0" cy="0"/>
+          <a:chOff x="0" y="0"/>
+          <a:chExt cx="0" cy="0"/>
+        </a:xfrm>
+      </p:grpSpPr>
+      <p:sp>
+        <p:nvSpPr>
+          <p:cNvPr id="3" name="Title"/>
+          <p:cNvSpPr>
+            <a:spLocks noGrp="1"/>
+          </p:cNvSpPr>
+          <p:nvPr>
+            <p:ph type="title"/>
+          </p:nvPr>
+        </p:nvSpPr>
+        <p:spPr/>
+        <p:txBody>
+          <a:bodyPr/>
+          <a:lstStyle/>
+          <a:p>
+            <a:pPr lvl="0"/>
+            <a:r>
+              <a:rPr lang="ja-JP"/>
+              <a:t>流入元の構成比（2026/09）</a:t>
+            </a:r>
+          </a:p>
+        </p:txBody>
+      </p:sp>
+      <p:sp>
+        <p:nvSpPr>
+          <p:cNvPr id="4" name="Lead"/>
+          <p:cNvSpPr>
+            <a:spLocks noGrp="1"/>
+          </p:cNvSpPr>
+          <p:nvPr>
+            <p:ph type="body" sz="quarter" idx="13"/>
+          </p:nvPr>
+        </p:nvSpPr>
+        <p:spPr/>
+        <p:txBody>
+          <a:bodyPr/>
+          <a:lstStyle/>
+          <a:p>
+            <a:pPr lvl="0"/>
+            <a:r>
+              <a:rPr lang="ja-JP"/>
+              <a:t>データは data4（横の report_charts.xlsx が正）</a:t>
+            </a:r>
+          </a:p>
+        </p:txBody>
+      </p:sp>
+      <p:graphicFrame>
+        <p:nvGraphicFramePr>
+          <p:cNvPr id="2" name="graph4"/>
+          <p:cNvGraphicFramePr/>
+          <p:nvPr/>
+        </p:nvGraphicFramePr>
+        <p:xfrm>
+          <a:off x="457200" y="1828800"/>
+          <a:ext cx="8229600" cy="2857500"/>
+        </p:xfrm>
+        <a:graphic>
+          <a:graphicData uri="http://schemas.openxmlformats.org/drawingml/2006/chart">
+            <c:chart xmlns:c="http://schemas.openxmlformats.org/drawingml/2006/chart" r:id="rId2"/>
+          </a:graphicData>
+        </a:graphic>
+      </p:graphicFrame>
+      <p:sp>
+        <p:nvSpPr>
+          <p:cNvPr id="5" name="SlideNumber"/>
+          <p:cNvSpPr>
+            <a:spLocks noGrp="1"/>
+          </p:cNvSpPr>
+          <p:nvPr>
+            <p:ph type="sldNum" sz="quarter" idx="12"/>
+          </p:nvPr>
+        </p:nvSpPr>
+        <p:spPr/>
+        <p:txBody>
+          <a:bodyPr/>
+          <a:lstStyle/>
+          <a:p>
+            <a:fld id="{B6F15528-21DE-4FAA-801E-634DDDAF4B2B}" type="slidenum">
+              <a:rPr lang="ja-JP"/>
+              <a:t>‹#›</a:t>
+            </a:fld>
+          </a:p>
+        </p:txBody>
+      </p:sp>
+    </p:spTree>
+  </p:cSld>
+  <p:clrMapOvr>
+    <a:masterClrMapping/>
+  </p:clrMapOvr>
+</p:sld>
+</file>
+
+<file path=ppt/slides/slide12.xml><?xml version="1.0" encoding="utf-8"?>
+<p:sld xmlns:a="http://schemas.openxmlformats.org/drawingml/2006/main" xmlns:r="http://schemas.openxmlformats.org/officeDocument/2006/relationships" xmlns:p="http://schemas.openxmlformats.org/presentationml/2006/main">
+  <p:cSld>
+    <p:spTree>
+      <p:nvGrpSpPr>
+        <p:cNvPr id="1" name=""/>
+        <p:cNvGrpSpPr/>
+        <p:nvPr/>
+      </p:nvGrpSpPr>
+      <p:grpSpPr>
+        <a:xfrm>
+          <a:off x="0" y="0"/>
+          <a:ext cx="0" cy="0"/>
+          <a:chOff x="0" y="0"/>
+          <a:chExt cx="0" cy="0"/>
+        </a:xfrm>
+      </p:grpSpPr>
+      <p:sp>
+        <p:nvSpPr>
+          <p:cNvPr id="3" name="Title"/>
+          <p:cNvSpPr>
+            <a:spLocks noGrp="1"/>
+          </p:cNvSpPr>
+          <p:nvPr>
+            <p:ph type="title"/>
+          </p:nvPr>
+        </p:nvSpPr>
+        <p:spPr/>
+        <p:txBody>
+          <a:bodyPr/>
+          <a:lstStyle/>
+          <a:p>
+            <a:pPr lvl="0"/>
+            <a:r>
+              <a:rPr lang="ja-JP"/>
+              <a:t>セッションと CVR</a:t>
+            </a:r>
+          </a:p>
+        </p:txBody>
+      </p:sp>
+      <p:sp>
+        <p:nvSpPr>
+          <p:cNvPr id="4" name="Lead"/>
+          <p:cNvSpPr>
+            <a:spLocks noGrp="1"/>
+          </p:cNvSpPr>
+          <p:nvPr>
+            <p:ph type="body" sz="quarter" idx="13"/>
+          </p:nvPr>
+        </p:nvSpPr>
+        <p:spPr/>
+        <p:txBody>
+          <a:bodyPr/>
+          <a:lstStyle/>
+          <a:p>
+            <a:pPr lvl="0"/>
+            <a:r>
+              <a:rPr lang="ja-JP"/>
+              <a:t>データは data5（横の report_charts.xlsx が正）</a:t>
+            </a:r>
+          </a:p>
+        </p:txBody>
+      </p:sp>
+      <p:graphicFrame>
+        <p:nvGraphicFramePr>
+          <p:cNvPr id="2" name="graph5"/>
+          <p:cNvGraphicFramePr/>
+          <p:nvPr/>
+        </p:nvGraphicFramePr>
+        <p:xfrm>
+          <a:off x="457200" y="1828800"/>
+          <a:ext cx="8229600" cy="2857500"/>
+        </p:xfrm>
+        <a:graphic>
+          <a:graphicData uri="http://schemas.openxmlformats.org/drawingml/2006/chart">
+            <c:chart xmlns:c="http://schemas.openxmlformats.org/drawingml/2006/chart" r:id="rId2"/>
+          </a:graphicData>
+        </a:graphic>
+      </p:graphicFrame>
+      <p:sp>
+        <p:nvSpPr>
+          <p:cNvPr id="5" name="SlideNumber"/>
+          <p:cNvSpPr>
+            <a:spLocks noGrp="1"/>
+          </p:cNvSpPr>
+          <p:nvPr>
+            <p:ph type="sldNum" sz="quarter" idx="12"/>
+          </p:nvPr>
+        </p:nvSpPr>
+        <p:spPr/>
+        <p:txBody>
+          <a:bodyPr/>
+          <a:lstStyle/>
+          <a:p>
+            <a:fld id="{B6F15528-21DE-4FAA-801E-634DDDAF4B2B}" type="slidenum">
+              <a:rPr lang="ja-JP"/>
+              <a:t>‹#›</a:t>
+            </a:fld>
+          </a:p>
+        </p:txBody>
+      </p:sp>
+    </p:spTree>
+  </p:cSld>
+  <p:clrMapOvr>
+    <a:masterClrMapping/>
+  </p:clrMapOvr>
+</p:sld>
+</file>
+
+<file path=ppt/slides/slide13.xml><?xml version="1.0" encoding="utf-8"?>
+<p:sld xmlns:a="http://schemas.openxmlformats.org/drawingml/2006/main" xmlns:r="http://schemas.openxmlformats.org/officeDocument/2006/relationships" xmlns:p="http://schemas.openxmlformats.org/presentationml/2006/main">
+  <p:cSld>
+    <p:spTree>
+      <p:nvGrpSpPr>
+        <p:cNvPr id="1" name=""/>
+        <p:cNvGrpSpPr/>
+        <p:nvPr/>
+      </p:nvGrpSpPr>
+      <p:grpSpPr>
+        <a:xfrm>
+          <a:off x="0" y="0"/>
+          <a:ext cx="0" cy="0"/>
+          <a:chOff x="0" y="0"/>
+          <a:chExt cx="0" cy="0"/>
+        </a:xfrm>
+      </p:grpSpPr>
+      <p:sp>
+        <p:nvSpPr>
+          <p:cNvPr id="3" name="Title"/>
+          <p:cNvSpPr>
+            <a:spLocks noGrp="1"/>
+          </p:cNvSpPr>
+          <p:nvPr>
+            <p:ph type="title"/>
+          </p:nvPr>
+        </p:nvSpPr>
+        <p:spPr/>
+        <p:txBody>
+          <a:bodyPr/>
+          <a:lstStyle/>
+          <a:p>
+            <a:pPr lvl="0"/>
+            <a:r>
+              <a:rPr lang="ja-JP"/>
+              <a:t>流入経路の前年との差</a:t>
+            </a:r>
+          </a:p>
+        </p:txBody>
+      </p:sp>
+      <p:sp>
+        <p:nvSpPr>
+          <p:cNvPr id="4" name="Lead"/>
+          <p:cNvSpPr>
+            <a:spLocks noGrp="1"/>
+          </p:cNvSpPr>
+          <p:nvPr>
+            <p:ph type="body" sz="quarter" idx="13"/>
+          </p:nvPr>
+        </p:nvSpPr>
+        <p:spPr/>
+        <p:txBody>
+          <a:bodyPr/>
+          <a:lstStyle/>
+          <a:p>
+            <a:pPr lvl="0"/>
+            <a:r>
+              <a:rPr lang="ja-JP"/>
+              <a:t>データは data7（横の report_charts.xlsx が正）</a:t>
+            </a:r>
+          </a:p>
+        </p:txBody>
+      </p:sp>
+      <p:graphicFrame>
+        <p:nvGraphicFramePr>
+          <p:cNvPr id="2" name="graph7"/>
+          <p:cNvGraphicFramePr/>
+          <p:nvPr/>
+        </p:nvGraphicFramePr>
+        <p:xfrm>
+          <a:off x="457200" y="1828800"/>
+          <a:ext cx="8229600" cy="2857500"/>
+        </p:xfrm>
+        <a:graphic>
+          <a:graphicData uri="http://schemas.openxmlformats.org/drawingml/2006/chart">
+            <c:chart xmlns:c="http://schemas.openxmlformats.org/drawingml/2006/chart" r:id="rId2"/>
+          </a:graphicData>
+        </a:graphic>
+      </p:graphicFrame>
+      <p:sp>
+        <p:nvSpPr>
+          <p:cNvPr id="5" name="SlideNumber"/>
+          <p:cNvSpPr>
+            <a:spLocks noGrp="1"/>
+          </p:cNvSpPr>
+          <p:nvPr>
+            <p:ph type="sldNum" sz="quarter" idx="12"/>
+          </p:nvPr>
+        </p:nvSpPr>
+        <p:spPr/>
+        <p:txBody>
+          <a:bodyPr/>
+          <a:lstStyle/>
+          <a:p>
+            <a:fld id="{B6F15528-21DE-4FAA-801E-634DDDAF4B2B}" type="slidenum">
+              <a:rPr lang="ja-JP"/>
+              <a:t>‹#›</a:t>
+            </a:fld>
+          </a:p>
+        </p:txBody>
+      </p:sp>
+    </p:spTree>
+  </p:cSld>
+  <p:clrMapOvr>
+    <a:masterClrMapping/>
+  </p:clrMapOvr>
+</p:sld>
+</file>
+
+<file path=ppt/slides/slide14.xml><?xml version="1.0" encoding="utf-8"?>
+<p:sld xmlns:a="http://schemas.openxmlformats.org/drawingml/2006/main" xmlns:r="http://schemas.openxmlformats.org/officeDocument/2006/relationships" xmlns:p="http://schemas.openxmlformats.org/presentationml/2006/main">
+  <p:cSld>
+    <p:spTree>
+      <p:nvGrpSpPr>
+        <p:cNvPr id="1" name=""/>
+        <p:cNvGrpSpPr/>
+        <p:nvPr/>
+      </p:nvGrpSpPr>
+      <p:grpSpPr>
+        <a:xfrm>
+          <a:off x="0" y="0"/>
+          <a:ext cx="0" cy="0"/>
+          <a:chOff x="0" y="0"/>
+          <a:chExt cx="0" cy="0"/>
+        </a:xfrm>
+      </p:grpSpPr>
+      <p:sp>
+        <p:nvSpPr>
+          <p:cNvPr id="3" name="Title"/>
+          <p:cNvSpPr>
+            <a:spLocks noGrp="1"/>
+          </p:cNvSpPr>
+          <p:nvPr>
+            <p:ph type="title"/>
+          </p:nvPr>
+        </p:nvSpPr>
+        <p:spPr/>
+        <p:txBody>
+          <a:bodyPr/>
+          <a:lstStyle/>
+          <a:p>
+            <a:pPr lvl="0"/>
+            <a:r>
+              <a:rPr lang="ja-JP"/>
+              <a:t>セッションの増減内訳（Excel 純正のウォーターフォール）</a:t>
+            </a:r>
+          </a:p>
+        </p:txBody>
+      </p:sp>
+      <p:sp>
+        <p:nvSpPr>
+          <p:cNvPr id="4" name="Lead"/>
+          <p:cNvSpPr>
+            <a:spLocks noGrp="1"/>
+          </p:cNvSpPr>
+          <p:nvPr>
+            <p:ph type="body" sz="quarter" idx="13"/>
+          </p:nvPr>
+        </p:nvSpPr>
+        <p:spPr/>
+        <p:txBody>
+          <a:bodyPr/>
+          <a:lstStyle/>
+          <a:p>
+            <a:pPr lvl="0"/>
+            <a:r>
+              <a:rPr lang="ja-JP"/>
+              <a:t>データは data8（横の report_charts.xlsx が正）</a:t>
+            </a:r>
+          </a:p>
+        </p:txBody>
+      </p:sp>
+      <p:graphicFrame>
+        <p:nvGraphicFramePr>
+          <p:cNvPr id="2" name="graph8"/>
+          <p:cNvGraphicFramePr/>
+          <p:nvPr/>
+        </p:nvGraphicFramePr>
+        <p:xfrm>
+          <a:off x="457200" y="1828800"/>
+          <a:ext cx="8229600" cy="2857500"/>
+        </p:xfrm>
+        <a:graphic>
+          <a:graphicData uri="http://schemas.microsoft.com/office/drawing/2014/chartex">
+            <cx:chart xmlns:cx="http://schemas.microsoft.com/office/drawing/2014/chartex" xmlns:r="http://schemas.openxmlformats.org/officeDocument/2006/relationships" r:id="rId2"/>
+          </a:graphicData>
+        </a:graphic>
+      </p:graphicFrame>
+      <p:sp>
+        <p:nvSpPr>
+          <p:cNvPr id="5" name="SlideNumber"/>
+          <p:cNvSpPr>
+            <a:spLocks noGrp="1"/>
+          </p:cNvSpPr>
+          <p:nvPr>
+            <p:ph type="sldNum" sz="quarter" idx="12"/>
+          </p:nvPr>
+        </p:nvSpPr>
+        <p:spPr/>
+        <p:txBody>
+          <a:bodyPr/>
+          <a:lstStyle/>
+          <a:p>
+            <a:fld id="{B6F15528-21DE-4FAA-801E-634DDDAF4B2B}" type="slidenum">
+              <a:rPr lang="ja-JP"/>
+              <a:t>‹#›</a:t>
+            </a:fld>
+          </a:p>
+        </p:txBody>
+      </p:sp>
+    </p:spTree>
+  </p:cSld>
+  <p:clrMapOvr>
+    <a:masterClrMapping/>
+  </p:clrMapOvr>
+</p:sld>
+</file>
+
+<file path=ppt/slides/slide15.xml><?xml version="1.0" encoding="utf-8"?>
+<p:sld xmlns:a="http://schemas.openxmlformats.org/drawingml/2006/main" xmlns:r="http://schemas.openxmlformats.org/officeDocument/2006/relationships" xmlns:p="http://schemas.openxmlformats.org/presentationml/2006/main">
+  <p:cSld>
+    <p:spTree>
+      <p:nvGrpSpPr>
+        <p:cNvPr id="1" name=""/>
+        <p:cNvGrpSpPr/>
+        <p:nvPr/>
+      </p:nvGrpSpPr>
+      <p:grpSpPr>
+        <a:xfrm>
+          <a:off x="0" y="0"/>
+          <a:ext cx="0" cy="0"/>
+          <a:chOff x="0" y="0"/>
+          <a:chExt cx="0" cy="0"/>
+        </a:xfrm>
+      </p:grpSpPr>
+      <p:sp>
+        <p:nvSpPr>
+          <p:cNvPr id="3" name="Title"/>
+          <p:cNvSpPr>
+            <a:spLocks noGrp="1"/>
+          </p:cNvSpPr>
+          <p:nvPr>
+            <p:ph type="title"/>
+          </p:nvPr>
+        </p:nvSpPr>
+        <p:spPr/>
+        <p:txBody>
+          <a:bodyPr/>
+          <a:lstStyle/>
+          <a:p>
+            <a:pPr lvl="0"/>
+            <a:r>
+              <a:rPr lang="ja-JP"/>
+              <a:t>セッションの増減内訳（8月→9月）</a:t>
+            </a:r>
+          </a:p>
+        </p:txBody>
+      </p:sp>
+      <p:sp>
+        <p:nvSpPr>
+          <p:cNvPr id="4" name="Lead"/>
+          <p:cNvSpPr>
+            <a:spLocks noGrp="1"/>
+          </p:cNvSpPr>
+          <p:nvPr>
+            <p:ph type="body" sz="quarter" idx="13"/>
+          </p:nvPr>
+        </p:nvSpPr>
+        <p:spPr/>
+        <p:txBody>
+          <a:bodyPr/>
+          <a:lstStyle/>
+          <a:p>
+            <a:pPr lvl="0"/>
+            <a:r>
+              <a:rPr lang="ja-JP"/>
+              <a:t>データは data6（横の report_charts.xlsx が正）</a:t>
+            </a:r>
+          </a:p>
+        </p:txBody>
+      </p:sp>
+      <p:graphicFrame>
+        <p:nvGraphicFramePr>
+          <p:cNvPr id="2" name="graph6"/>
           <p:cNvGraphicFramePr/>
           <p:nvPr/>
         </p:nvGraphicFramePr>
@@ -5204,7 +7982,7 @@
             <a:pPr lvl="0"/>
             <a:r>
               <a:rPr lang="ja-JP"/>
-              <a:t>ネイティブグラフ（graph1）。データはグラフ内の Excel と、横の report_charts.xlsx の data1 に同じものがある</a:t>
+              <a:t>データは data1（横の report_charts.xlsx が正）</a:t>
             </a:r>
           </a:p>
         </p:txBody>
@@ -5313,7 +8091,7 @@
             <a:pPr lvl="0"/>
             <a:r>
               <a:rPr lang="ja-JP"/>
-              <a:t>ネイティブグラフ（graph2）。データはグラフ内の Excel と、横の report_charts.xlsx の data2 に同じものがある</a:t>
+              <a:t>データは data2（横の report_charts.xlsx が正）</a:t>
             </a:r>
           </a:p>
         </p:txBody>

--- a/bigtree/samples/bigtree_lab_charts.pptx
+++ b/bigtree/samples/bigtree_lab_charts.pptx
@@ -3803,7 +3803,7 @@
           <a:p>
             <a:r>
               <a:rPr lang="ja-JP"/>
-              <a:t>2026-09-20 ｜ Bigtree Lab ｜ だいき君</a:t>
+              <a:t>2026-09-18 ｜ Bigtree Lab ｜ だいき君</a:t>
             </a:r>
           </a:p>
         </p:txBody>
@@ -6689,7 +6689,7 @@
           <a:p>
             <a:r>
               <a:rPr lang="ja-JP"/>
-              <a:t>2026-09-20 ｜ Bigtree Lab ｜ だいき君</a:t>
+              <a:t>2026-09-18 ｜ Bigtree Lab ｜ だいき君</a:t>
             </a:r>
           </a:p>
         </p:txBody>

--- a/bigtree/samples/bigtree_lab_charts.pptx
+++ b/bigtree/samples/bigtree_lab_charts.pptx
@@ -3396,129 +3396,129 @@
             <a:cxnLst/>
             <a:rect l="0" t="0" r="r" b="b"/>
             <a:pathLst>
-              <a:path w="41660" h="54887">
+              <a:path w="347028" h="457200">
                 <a:moveTo>
-                  <a:pt x="1000" y="3887"/>
+                  <a:pt x="8330" y="32378"/>
                 </a:moveTo>
                 <a:lnTo>
-                  <a:pt x="1000" y="13887"/>
-                </a:lnTo>
-                <a:lnTo>
-                  <a:pt x="6000" y="16774"/>
-                </a:lnTo>
-                <a:lnTo>
-                  <a:pt x="6000" y="13887"/>
-                </a:lnTo>
-                <a:lnTo>
-                  <a:pt x="6000" y="8887"/>
-                </a:lnTo>
-                <a:lnTo>
-                  <a:pt x="23321" y="18887"/>
-                </a:lnTo>
-                <a:lnTo>
-                  <a:pt x="14660" y="23887"/>
-                </a:lnTo>
-                <a:lnTo>
-                  <a:pt x="15000" y="23887"/>
-                </a:lnTo>
-                <a:lnTo>
-                  <a:pt x="32320" y="33887"/>
-                </a:lnTo>
-                <a:lnTo>
-                  <a:pt x="23660" y="38887"/>
-                </a:lnTo>
-                <a:lnTo>
-                  <a:pt x="32000" y="38887"/>
-                </a:lnTo>
-                <a:lnTo>
-                  <a:pt x="40660" y="33887"/>
-                </a:lnTo>
-                <a:lnTo>
-                  <a:pt x="23340" y="23887"/>
-                </a:lnTo>
-                <a:lnTo>
-                  <a:pt x="32000" y="18887"/>
-                </a:lnTo>
-                <a:lnTo>
-                  <a:pt x="31981" y="18887"/>
-                </a:lnTo>
-                <a:lnTo>
-                  <a:pt x="14660" y="8887"/>
-                </a:lnTo>
-                <a:lnTo>
-                  <a:pt x="6000" y="3887"/>
-                </a:lnTo>
-                <a:lnTo>
-                  <a:pt x="1000" y="1000"/>
+                  <a:pt x="8330" y="115676"/>
+                </a:lnTo>
+                <a:lnTo>
+                  <a:pt x="49980" y="139724"/>
+                </a:lnTo>
+                <a:lnTo>
+                  <a:pt x="49980" y="115676"/>
+                </a:lnTo>
+                <a:lnTo>
+                  <a:pt x="49980" y="74027"/>
+                </a:lnTo>
+                <a:lnTo>
+                  <a:pt x="194264" y="157325"/>
+                </a:lnTo>
+                <a:lnTo>
+                  <a:pt x="122117" y="198974"/>
+                </a:lnTo>
+                <a:lnTo>
+                  <a:pt x="124950" y="198974"/>
+                </a:lnTo>
+                <a:lnTo>
+                  <a:pt x="269234" y="282273"/>
+                </a:lnTo>
+                <a:lnTo>
+                  <a:pt x="197087" y="323922"/>
+                </a:lnTo>
+                <a:lnTo>
+                  <a:pt x="266560" y="323922"/>
+                </a:lnTo>
+                <a:lnTo>
+                  <a:pt x="338697" y="282273"/>
+                </a:lnTo>
+                <a:lnTo>
+                  <a:pt x="194422" y="198974"/>
+                </a:lnTo>
+                <a:lnTo>
+                  <a:pt x="266560" y="157325"/>
+                </a:lnTo>
+                <a:lnTo>
+                  <a:pt x="266401" y="157325"/>
+                </a:lnTo>
+                <a:lnTo>
+                  <a:pt x="122117" y="74027"/>
+                </a:lnTo>
+                <a:lnTo>
+                  <a:pt x="49980" y="32378"/>
+                </a:lnTo>
+                <a:lnTo>
+                  <a:pt x="8330" y="8329"/>
                 </a:lnTo>
                 <a:close/>
               </a:path>
-              <a:path w="41660" h="54887">
+              <a:path w="347028" h="457200">
                 <a:moveTo>
-                  <a:pt x="11000" y="38887"/>
+                  <a:pt x="91630" y="323922"/>
                 </a:moveTo>
                 <a:lnTo>
-                  <a:pt x="16000" y="38887"/>
-                </a:lnTo>
-                <a:lnTo>
-                  <a:pt x="17340" y="38887"/>
-                </a:lnTo>
-                <a:lnTo>
-                  <a:pt x="26000" y="33887"/>
-                </a:lnTo>
-                <a:lnTo>
-                  <a:pt x="16000" y="33887"/>
-                </a:lnTo>
-                <a:lnTo>
-                  <a:pt x="16000" y="28887"/>
-                </a:lnTo>
-                <a:lnTo>
-                  <a:pt x="11000" y="26000"/>
+                  <a:pt x="133280" y="323922"/>
+                </a:lnTo>
+                <a:lnTo>
+                  <a:pt x="144442" y="323922"/>
+                </a:lnTo>
+                <a:lnTo>
+                  <a:pt x="216580" y="282273"/>
+                </a:lnTo>
+                <a:lnTo>
+                  <a:pt x="133280" y="282273"/>
+                </a:lnTo>
+                <a:lnTo>
+                  <a:pt x="133280" y="240624"/>
+                </a:lnTo>
+                <a:lnTo>
+                  <a:pt x="91630" y="216575"/>
                 </a:lnTo>
                 <a:close/>
               </a:path>
-              <a:path w="41660" h="54887">
+              <a:path w="347028" h="457200">
                 <a:moveTo>
-                  <a:pt x="6000" y="21774"/>
+                  <a:pt x="49980" y="181373"/>
                 </a:moveTo>
                 <a:lnTo>
-                  <a:pt x="1000" y="18887"/>
-                </a:lnTo>
-                <a:lnTo>
-                  <a:pt x="1000" y="43887"/>
-                </a:lnTo>
-                <a:lnTo>
-                  <a:pt x="1000" y="48887"/>
-                </a:lnTo>
-                <a:lnTo>
-                  <a:pt x="1000" y="53887"/>
-                </a:lnTo>
-                <a:lnTo>
-                  <a:pt x="18113" y="53887"/>
-                </a:lnTo>
-                <a:lnTo>
-                  <a:pt x="21000" y="48887"/>
-                </a:lnTo>
-                <a:lnTo>
-                  <a:pt x="6000" y="48887"/>
-                </a:lnTo>
-                <a:lnTo>
-                  <a:pt x="6000" y="43887"/>
+                  <a:pt x="8330" y="157325"/>
+                </a:lnTo>
+                <a:lnTo>
+                  <a:pt x="8330" y="365571"/>
+                </a:lnTo>
+                <a:lnTo>
+                  <a:pt x="8330" y="407220"/>
+                </a:lnTo>
+                <a:lnTo>
+                  <a:pt x="8330" y="448870"/>
+                </a:lnTo>
+                <a:lnTo>
+                  <a:pt x="150881" y="448870"/>
+                </a:lnTo>
+                <a:lnTo>
+                  <a:pt x="174930" y="407220"/>
+                </a:lnTo>
+                <a:lnTo>
+                  <a:pt x="49980" y="407220"/>
+                </a:lnTo>
+                <a:lnTo>
+                  <a:pt x="49980" y="365571"/>
                 </a:lnTo>
                 <a:close/>
               </a:path>
-              <a:path w="41660" h="54887">
+              <a:path w="347028" h="457200">
                 <a:moveTo>
-                  <a:pt x="23113" y="53887"/>
+                  <a:pt x="192531" y="448870"/>
                 </a:moveTo>
                 <a:lnTo>
-                  <a:pt x="26000" y="48887"/>
-                </a:lnTo>
-                <a:lnTo>
-                  <a:pt x="23000" y="48887"/>
-                </a:lnTo>
-                <a:lnTo>
-                  <a:pt x="20113" y="53887"/>
+                  <a:pt x="216580" y="407220"/>
+                </a:lnTo>
+                <a:lnTo>
+                  <a:pt x="191590" y="407220"/>
+                </a:lnTo>
+                <a:lnTo>
+                  <a:pt x="167541" y="448870"/>
                 </a:lnTo>
                 <a:close/>
               </a:path>
@@ -3921,129 +3921,129 @@
             <a:cxnLst/>
             <a:rect l="0" t="0" r="r" b="b"/>
             <a:pathLst>
-              <a:path w="41660" h="54887">
+              <a:path w="3123184" h="4114800">
                 <a:moveTo>
-                  <a:pt x="1000" y="3887"/>
+                  <a:pt x="74968" y="291402"/>
                 </a:moveTo>
                 <a:lnTo>
-                  <a:pt x="1000" y="13887"/>
-                </a:lnTo>
-                <a:lnTo>
-                  <a:pt x="6000" y="16774"/>
-                </a:lnTo>
-                <a:lnTo>
-                  <a:pt x="6000" y="13887"/>
-                </a:lnTo>
-                <a:lnTo>
-                  <a:pt x="6000" y="8887"/>
-                </a:lnTo>
-                <a:lnTo>
-                  <a:pt x="23321" y="18887"/>
-                </a:lnTo>
-                <a:lnTo>
-                  <a:pt x="14660" y="23887"/>
-                </a:lnTo>
-                <a:lnTo>
-                  <a:pt x="15000" y="23887"/>
-                </a:lnTo>
-                <a:lnTo>
-                  <a:pt x="32320" y="33887"/>
-                </a:lnTo>
-                <a:lnTo>
-                  <a:pt x="23660" y="38887"/>
-                </a:lnTo>
-                <a:lnTo>
-                  <a:pt x="32000" y="38887"/>
-                </a:lnTo>
-                <a:lnTo>
-                  <a:pt x="40660" y="33887"/>
-                </a:lnTo>
-                <a:lnTo>
-                  <a:pt x="23340" y="23887"/>
-                </a:lnTo>
-                <a:lnTo>
-                  <a:pt x="32000" y="18887"/>
-                </a:lnTo>
-                <a:lnTo>
-                  <a:pt x="31981" y="18887"/>
-                </a:lnTo>
-                <a:lnTo>
-                  <a:pt x="14660" y="8887"/>
-                </a:lnTo>
-                <a:lnTo>
-                  <a:pt x="6000" y="3887"/>
-                </a:lnTo>
-                <a:lnTo>
-                  <a:pt x="1000" y="1000"/>
+                  <a:pt x="74968" y="1041088"/>
+                </a:lnTo>
+                <a:lnTo>
+                  <a:pt x="449810" y="1257522"/>
+                </a:lnTo>
+                <a:lnTo>
+                  <a:pt x="449810" y="1041088"/>
+                </a:lnTo>
+                <a:lnTo>
+                  <a:pt x="449810" y="666245"/>
+                </a:lnTo>
+                <a:lnTo>
+                  <a:pt x="1748338" y="1415931"/>
+                </a:lnTo>
+                <a:lnTo>
+                  <a:pt x="1099036" y="1790774"/>
+                </a:lnTo>
+                <a:lnTo>
+                  <a:pt x="1124526" y="1790774"/>
+                </a:lnTo>
+                <a:lnTo>
+                  <a:pt x="2423054" y="2540459"/>
+                </a:lnTo>
+                <a:lnTo>
+                  <a:pt x="1773752" y="2915302"/>
+                </a:lnTo>
+                <a:lnTo>
+                  <a:pt x="2398989" y="2915302"/>
+                </a:lnTo>
+                <a:lnTo>
+                  <a:pt x="3048215" y="2540459"/>
+                </a:lnTo>
+                <a:lnTo>
+                  <a:pt x="1749762" y="1790774"/>
+                </a:lnTo>
+                <a:lnTo>
+                  <a:pt x="2398989" y="1415931"/>
+                </a:lnTo>
+                <a:lnTo>
+                  <a:pt x="2397564" y="1415931"/>
+                </a:lnTo>
+                <a:lnTo>
+                  <a:pt x="1099036" y="666245"/>
+                </a:lnTo>
+                <a:lnTo>
+                  <a:pt x="449810" y="291402"/>
+                </a:lnTo>
+                <a:lnTo>
+                  <a:pt x="74968" y="74968"/>
                 </a:lnTo>
                 <a:close/>
               </a:path>
-              <a:path w="41660" h="54887">
+              <a:path w="3123184" h="4114800">
                 <a:moveTo>
-                  <a:pt x="11000" y="38887"/>
+                  <a:pt x="824652" y="2915302"/>
                 </a:moveTo>
                 <a:lnTo>
-                  <a:pt x="16000" y="38887"/>
-                </a:lnTo>
-                <a:lnTo>
-                  <a:pt x="17340" y="38887"/>
-                </a:lnTo>
-                <a:lnTo>
-                  <a:pt x="26000" y="33887"/>
-                </a:lnTo>
-                <a:lnTo>
-                  <a:pt x="16000" y="33887"/>
-                </a:lnTo>
-                <a:lnTo>
-                  <a:pt x="16000" y="28887"/>
-                </a:lnTo>
-                <a:lnTo>
-                  <a:pt x="11000" y="26000"/>
+                  <a:pt x="1199494" y="2915302"/>
+                </a:lnTo>
+                <a:lnTo>
+                  <a:pt x="1299952" y="2915302"/>
+                </a:lnTo>
+                <a:lnTo>
+                  <a:pt x="1949178" y="2540459"/>
+                </a:lnTo>
+                <a:lnTo>
+                  <a:pt x="1199494" y="2540459"/>
+                </a:lnTo>
+                <a:lnTo>
+                  <a:pt x="1199494" y="2165617"/>
+                </a:lnTo>
+                <a:lnTo>
+                  <a:pt x="824652" y="1949182"/>
                 </a:lnTo>
                 <a:close/>
               </a:path>
-              <a:path w="41660" h="54887">
+              <a:path w="3123184" h="4114800">
                 <a:moveTo>
-                  <a:pt x="6000" y="21774"/>
+                  <a:pt x="449810" y="1632365"/>
                 </a:moveTo>
                 <a:lnTo>
-                  <a:pt x="1000" y="18887"/>
-                </a:lnTo>
-                <a:lnTo>
-                  <a:pt x="1000" y="43887"/>
-                </a:lnTo>
-                <a:lnTo>
-                  <a:pt x="1000" y="48887"/>
-                </a:lnTo>
-                <a:lnTo>
-                  <a:pt x="1000" y="53887"/>
-                </a:lnTo>
-                <a:lnTo>
-                  <a:pt x="18113" y="53887"/>
-                </a:lnTo>
-                <a:lnTo>
-                  <a:pt x="21000" y="48887"/>
-                </a:lnTo>
-                <a:lnTo>
-                  <a:pt x="6000" y="48887"/>
-                </a:lnTo>
-                <a:lnTo>
-                  <a:pt x="6000" y="43887"/>
+                  <a:pt x="74968" y="1415931"/>
+                </a:lnTo>
+                <a:lnTo>
+                  <a:pt x="74968" y="3290145"/>
+                </a:lnTo>
+                <a:lnTo>
+                  <a:pt x="74968" y="3664988"/>
+                </a:lnTo>
+                <a:lnTo>
+                  <a:pt x="74968" y="4039831"/>
+                </a:lnTo>
+                <a:lnTo>
+                  <a:pt x="1357902" y="4039831"/>
+                </a:lnTo>
+                <a:lnTo>
+                  <a:pt x="1574336" y="3664988"/>
+                </a:lnTo>
+                <a:lnTo>
+                  <a:pt x="449810" y="3664988"/>
+                </a:lnTo>
+                <a:lnTo>
+                  <a:pt x="449810" y="3290145"/>
                 </a:lnTo>
                 <a:close/>
               </a:path>
-              <a:path w="41660" h="54887">
+              <a:path w="3123184" h="4114800">
                 <a:moveTo>
-                  <a:pt x="23113" y="53887"/>
+                  <a:pt x="1732744" y="4039831"/>
                 </a:moveTo>
                 <a:lnTo>
-                  <a:pt x="26000" y="48887"/>
-                </a:lnTo>
-                <a:lnTo>
-                  <a:pt x="23000" y="48887"/>
-                </a:lnTo>
-                <a:lnTo>
-                  <a:pt x="20113" y="53887"/>
+                  <a:pt x="1949178" y="3664988"/>
+                </a:lnTo>
+                <a:lnTo>
+                  <a:pt x="1724273" y="3664988"/>
+                </a:lnTo>
+                <a:lnTo>
+                  <a:pt x="1507839" y="4039831"/>
                 </a:lnTo>
                 <a:close/>
               </a:path>
@@ -4344,129 +4344,129 @@
             <a:cxnLst/>
             <a:rect l="0" t="0" r="r" b="b"/>
             <a:pathLst>
-              <a:path w="41660" h="54887">
+              <a:path w="3123184" h="4114800">
                 <a:moveTo>
-                  <a:pt x="1000" y="3887"/>
+                  <a:pt x="74968" y="291402"/>
                 </a:moveTo>
                 <a:lnTo>
-                  <a:pt x="1000" y="13887"/>
-                </a:lnTo>
-                <a:lnTo>
-                  <a:pt x="6000" y="16774"/>
-                </a:lnTo>
-                <a:lnTo>
-                  <a:pt x="6000" y="13887"/>
-                </a:lnTo>
-                <a:lnTo>
-                  <a:pt x="6000" y="8887"/>
-                </a:lnTo>
-                <a:lnTo>
-                  <a:pt x="23321" y="18887"/>
-                </a:lnTo>
-                <a:lnTo>
-                  <a:pt x="14660" y="23887"/>
-                </a:lnTo>
-                <a:lnTo>
-                  <a:pt x="15000" y="23887"/>
-                </a:lnTo>
-                <a:lnTo>
-                  <a:pt x="32320" y="33887"/>
-                </a:lnTo>
-                <a:lnTo>
-                  <a:pt x="23660" y="38887"/>
-                </a:lnTo>
-                <a:lnTo>
-                  <a:pt x="32000" y="38887"/>
-                </a:lnTo>
-                <a:lnTo>
-                  <a:pt x="40660" y="33887"/>
-                </a:lnTo>
-                <a:lnTo>
-                  <a:pt x="23340" y="23887"/>
-                </a:lnTo>
-                <a:lnTo>
-                  <a:pt x="32000" y="18887"/>
-                </a:lnTo>
-                <a:lnTo>
-                  <a:pt x="31981" y="18887"/>
-                </a:lnTo>
-                <a:lnTo>
-                  <a:pt x="14660" y="8887"/>
-                </a:lnTo>
-                <a:lnTo>
-                  <a:pt x="6000" y="3887"/>
-                </a:lnTo>
-                <a:lnTo>
-                  <a:pt x="1000" y="1000"/>
+                  <a:pt x="74968" y="1041088"/>
+                </a:lnTo>
+                <a:lnTo>
+                  <a:pt x="449810" y="1257522"/>
+                </a:lnTo>
+                <a:lnTo>
+                  <a:pt x="449810" y="1041088"/>
+                </a:lnTo>
+                <a:lnTo>
+                  <a:pt x="449810" y="666245"/>
+                </a:lnTo>
+                <a:lnTo>
+                  <a:pt x="1748338" y="1415931"/>
+                </a:lnTo>
+                <a:lnTo>
+                  <a:pt x="1099036" y="1790774"/>
+                </a:lnTo>
+                <a:lnTo>
+                  <a:pt x="1124526" y="1790774"/>
+                </a:lnTo>
+                <a:lnTo>
+                  <a:pt x="2423054" y="2540459"/>
+                </a:lnTo>
+                <a:lnTo>
+                  <a:pt x="1773752" y="2915302"/>
+                </a:lnTo>
+                <a:lnTo>
+                  <a:pt x="2398989" y="2915302"/>
+                </a:lnTo>
+                <a:lnTo>
+                  <a:pt x="3048215" y="2540459"/>
+                </a:lnTo>
+                <a:lnTo>
+                  <a:pt x="1749762" y="1790774"/>
+                </a:lnTo>
+                <a:lnTo>
+                  <a:pt x="2398989" y="1415931"/>
+                </a:lnTo>
+                <a:lnTo>
+                  <a:pt x="2397564" y="1415931"/>
+                </a:lnTo>
+                <a:lnTo>
+                  <a:pt x="1099036" y="666245"/>
+                </a:lnTo>
+                <a:lnTo>
+                  <a:pt x="449810" y="291402"/>
+                </a:lnTo>
+                <a:lnTo>
+                  <a:pt x="74968" y="74968"/>
                 </a:lnTo>
                 <a:close/>
               </a:path>
-              <a:path w="41660" h="54887">
+              <a:path w="3123184" h="4114800">
                 <a:moveTo>
-                  <a:pt x="11000" y="38887"/>
+                  <a:pt x="824652" y="2915302"/>
                 </a:moveTo>
                 <a:lnTo>
-                  <a:pt x="16000" y="38887"/>
-                </a:lnTo>
-                <a:lnTo>
-                  <a:pt x="17340" y="38887"/>
-                </a:lnTo>
-                <a:lnTo>
-                  <a:pt x="26000" y="33887"/>
-                </a:lnTo>
-                <a:lnTo>
-                  <a:pt x="16000" y="33887"/>
-                </a:lnTo>
-                <a:lnTo>
-                  <a:pt x="16000" y="28887"/>
-                </a:lnTo>
-                <a:lnTo>
-                  <a:pt x="11000" y="26000"/>
+                  <a:pt x="1199494" y="2915302"/>
+                </a:lnTo>
+                <a:lnTo>
+                  <a:pt x="1299952" y="2915302"/>
+                </a:lnTo>
+                <a:lnTo>
+                  <a:pt x="1949178" y="2540459"/>
+                </a:lnTo>
+                <a:lnTo>
+                  <a:pt x="1199494" y="2540459"/>
+                </a:lnTo>
+                <a:lnTo>
+                  <a:pt x="1199494" y="2165617"/>
+                </a:lnTo>
+                <a:lnTo>
+                  <a:pt x="824652" y="1949182"/>
                 </a:lnTo>
                 <a:close/>
               </a:path>
-              <a:path w="41660" h="54887">
+              <a:path w="3123184" h="4114800">
                 <a:moveTo>
-                  <a:pt x="6000" y="21774"/>
+                  <a:pt x="449810" y="1632365"/>
                 </a:moveTo>
                 <a:lnTo>
-                  <a:pt x="1000" y="18887"/>
-                </a:lnTo>
-                <a:lnTo>
-                  <a:pt x="1000" y="43887"/>
-                </a:lnTo>
-                <a:lnTo>
-                  <a:pt x="1000" y="48887"/>
-                </a:lnTo>
-                <a:lnTo>
-                  <a:pt x="1000" y="53887"/>
-                </a:lnTo>
-                <a:lnTo>
-                  <a:pt x="18113" y="53887"/>
-                </a:lnTo>
-                <a:lnTo>
-                  <a:pt x="21000" y="48887"/>
-                </a:lnTo>
-                <a:lnTo>
-                  <a:pt x="6000" y="48887"/>
-                </a:lnTo>
-                <a:lnTo>
-                  <a:pt x="6000" y="43887"/>
+                  <a:pt x="74968" y="1415931"/>
+                </a:lnTo>
+                <a:lnTo>
+                  <a:pt x="74968" y="3290145"/>
+                </a:lnTo>
+                <a:lnTo>
+                  <a:pt x="74968" y="3664988"/>
+                </a:lnTo>
+                <a:lnTo>
+                  <a:pt x="74968" y="4039831"/>
+                </a:lnTo>
+                <a:lnTo>
+                  <a:pt x="1357902" y="4039831"/>
+                </a:lnTo>
+                <a:lnTo>
+                  <a:pt x="1574336" y="3664988"/>
+                </a:lnTo>
+                <a:lnTo>
+                  <a:pt x="449810" y="3664988"/>
+                </a:lnTo>
+                <a:lnTo>
+                  <a:pt x="449810" y="3290145"/>
                 </a:lnTo>
                 <a:close/>
               </a:path>
-              <a:path w="41660" h="54887">
+              <a:path w="3123184" h="4114800">
                 <a:moveTo>
-                  <a:pt x="23113" y="53887"/>
+                  <a:pt x="1732744" y="4039831"/>
                 </a:moveTo>
                 <a:lnTo>
-                  <a:pt x="26000" y="48887"/>
-                </a:lnTo>
-                <a:lnTo>
-                  <a:pt x="23000" y="48887"/>
-                </a:lnTo>
-                <a:lnTo>
-                  <a:pt x="20113" y="53887"/>
+                  <a:pt x="1949178" y="3664988"/>
+                </a:lnTo>
+                <a:lnTo>
+                  <a:pt x="1724273" y="3664988"/>
+                </a:lnTo>
+                <a:lnTo>
+                  <a:pt x="1507839" y="4039831"/>
                 </a:lnTo>
                 <a:close/>
               </a:path>
@@ -4767,129 +4767,129 @@
             <a:cxnLst/>
             <a:rect l="0" t="0" r="r" b="b"/>
             <a:pathLst>
-              <a:path w="41660" h="54887">
+              <a:path w="3123184" h="4114800">
                 <a:moveTo>
-                  <a:pt x="1000" y="3887"/>
+                  <a:pt x="74968" y="291402"/>
                 </a:moveTo>
                 <a:lnTo>
-                  <a:pt x="1000" y="13887"/>
-                </a:lnTo>
-                <a:lnTo>
-                  <a:pt x="6000" y="16774"/>
-                </a:lnTo>
-                <a:lnTo>
-                  <a:pt x="6000" y="13887"/>
-                </a:lnTo>
-                <a:lnTo>
-                  <a:pt x="6000" y="8887"/>
-                </a:lnTo>
-                <a:lnTo>
-                  <a:pt x="23321" y="18887"/>
-                </a:lnTo>
-                <a:lnTo>
-                  <a:pt x="14660" y="23887"/>
-                </a:lnTo>
-                <a:lnTo>
-                  <a:pt x="15000" y="23887"/>
-                </a:lnTo>
-                <a:lnTo>
-                  <a:pt x="32320" y="33887"/>
-                </a:lnTo>
-                <a:lnTo>
-                  <a:pt x="23660" y="38887"/>
-                </a:lnTo>
-                <a:lnTo>
-                  <a:pt x="32000" y="38887"/>
-                </a:lnTo>
-                <a:lnTo>
-                  <a:pt x="40660" y="33887"/>
-                </a:lnTo>
-                <a:lnTo>
-                  <a:pt x="23340" y="23887"/>
-                </a:lnTo>
-                <a:lnTo>
-                  <a:pt x="32000" y="18887"/>
-                </a:lnTo>
-                <a:lnTo>
-                  <a:pt x="31981" y="18887"/>
-                </a:lnTo>
-                <a:lnTo>
-                  <a:pt x="14660" y="8887"/>
-                </a:lnTo>
-                <a:lnTo>
-                  <a:pt x="6000" y="3887"/>
-                </a:lnTo>
-                <a:lnTo>
-                  <a:pt x="1000" y="1000"/>
+                  <a:pt x="74968" y="1041088"/>
+                </a:lnTo>
+                <a:lnTo>
+                  <a:pt x="449810" y="1257522"/>
+                </a:lnTo>
+                <a:lnTo>
+                  <a:pt x="449810" y="1041088"/>
+                </a:lnTo>
+                <a:lnTo>
+                  <a:pt x="449810" y="666245"/>
+                </a:lnTo>
+                <a:lnTo>
+                  <a:pt x="1748338" y="1415931"/>
+                </a:lnTo>
+                <a:lnTo>
+                  <a:pt x="1099036" y="1790774"/>
+                </a:lnTo>
+                <a:lnTo>
+                  <a:pt x="1124526" y="1790774"/>
+                </a:lnTo>
+                <a:lnTo>
+                  <a:pt x="2423054" y="2540459"/>
+                </a:lnTo>
+                <a:lnTo>
+                  <a:pt x="1773752" y="2915302"/>
+                </a:lnTo>
+                <a:lnTo>
+                  <a:pt x="2398989" y="2915302"/>
+                </a:lnTo>
+                <a:lnTo>
+                  <a:pt x="3048215" y="2540459"/>
+                </a:lnTo>
+                <a:lnTo>
+                  <a:pt x="1749762" y="1790774"/>
+                </a:lnTo>
+                <a:lnTo>
+                  <a:pt x="2398989" y="1415931"/>
+                </a:lnTo>
+                <a:lnTo>
+                  <a:pt x="2397564" y="1415931"/>
+                </a:lnTo>
+                <a:lnTo>
+                  <a:pt x="1099036" y="666245"/>
+                </a:lnTo>
+                <a:lnTo>
+                  <a:pt x="449810" y="291402"/>
+                </a:lnTo>
+                <a:lnTo>
+                  <a:pt x="74968" y="74968"/>
                 </a:lnTo>
                 <a:close/>
               </a:path>
-              <a:path w="41660" h="54887">
+              <a:path w="3123184" h="4114800">
                 <a:moveTo>
-                  <a:pt x="11000" y="38887"/>
+                  <a:pt x="824652" y="2915302"/>
                 </a:moveTo>
                 <a:lnTo>
-                  <a:pt x="16000" y="38887"/>
-                </a:lnTo>
-                <a:lnTo>
-                  <a:pt x="17340" y="38887"/>
-                </a:lnTo>
-                <a:lnTo>
-                  <a:pt x="26000" y="33887"/>
-                </a:lnTo>
-                <a:lnTo>
-                  <a:pt x="16000" y="33887"/>
-                </a:lnTo>
-                <a:lnTo>
-                  <a:pt x="16000" y="28887"/>
-                </a:lnTo>
-                <a:lnTo>
-                  <a:pt x="11000" y="26000"/>
+                  <a:pt x="1199494" y="2915302"/>
+                </a:lnTo>
+                <a:lnTo>
+                  <a:pt x="1299952" y="2915302"/>
+                </a:lnTo>
+                <a:lnTo>
+                  <a:pt x="1949178" y="2540459"/>
+                </a:lnTo>
+                <a:lnTo>
+                  <a:pt x="1199494" y="2540459"/>
+                </a:lnTo>
+                <a:lnTo>
+                  <a:pt x="1199494" y="2165617"/>
+                </a:lnTo>
+                <a:lnTo>
+                  <a:pt x="824652" y="1949182"/>
                 </a:lnTo>
                 <a:close/>
               </a:path>
-              <a:path w="41660" h="54887">
+              <a:path w="3123184" h="4114800">
                 <a:moveTo>
-                  <a:pt x="6000" y="21774"/>
+                  <a:pt x="449810" y="1632365"/>
                 </a:moveTo>
                 <a:lnTo>
-                  <a:pt x="1000" y="18887"/>
-                </a:lnTo>
-                <a:lnTo>
-                  <a:pt x="1000" y="43887"/>
-                </a:lnTo>
-                <a:lnTo>
-                  <a:pt x="1000" y="48887"/>
-                </a:lnTo>
-                <a:lnTo>
-                  <a:pt x="1000" y="53887"/>
-                </a:lnTo>
-                <a:lnTo>
-                  <a:pt x="18113" y="53887"/>
-                </a:lnTo>
-                <a:lnTo>
-                  <a:pt x="21000" y="48887"/>
-                </a:lnTo>
-                <a:lnTo>
-                  <a:pt x="6000" y="48887"/>
-                </a:lnTo>
-                <a:lnTo>
-                  <a:pt x="6000" y="43887"/>
+                  <a:pt x="74968" y="1415931"/>
+                </a:lnTo>
+                <a:lnTo>
+                  <a:pt x="74968" y="3290145"/>
+                </a:lnTo>
+                <a:lnTo>
+                  <a:pt x="74968" y="3664988"/>
+                </a:lnTo>
+                <a:lnTo>
+                  <a:pt x="74968" y="4039831"/>
+                </a:lnTo>
+                <a:lnTo>
+                  <a:pt x="1357902" y="4039831"/>
+                </a:lnTo>
+                <a:lnTo>
+                  <a:pt x="1574336" y="3664988"/>
+                </a:lnTo>
+                <a:lnTo>
+                  <a:pt x="449810" y="3664988"/>
+                </a:lnTo>
+                <a:lnTo>
+                  <a:pt x="449810" y="3290145"/>
                 </a:lnTo>
                 <a:close/>
               </a:path>
-              <a:path w="41660" h="54887">
+              <a:path w="3123184" h="4114800">
                 <a:moveTo>
-                  <a:pt x="23113" y="53887"/>
+                  <a:pt x="1732744" y="4039831"/>
                 </a:moveTo>
                 <a:lnTo>
-                  <a:pt x="26000" y="48887"/>
-                </a:lnTo>
-                <a:lnTo>
-                  <a:pt x="23000" y="48887"/>
-                </a:lnTo>
-                <a:lnTo>
-                  <a:pt x="20113" y="53887"/>
+                  <a:pt x="1949178" y="3664988"/>
+                </a:lnTo>
+                <a:lnTo>
+                  <a:pt x="1724273" y="3664988"/>
+                </a:lnTo>
+                <a:lnTo>
+                  <a:pt x="1507839" y="4039831"/>
                 </a:lnTo>
                 <a:close/>
               </a:path>
@@ -5110,129 +5110,129 @@
             <a:cxnLst/>
             <a:rect l="0" t="0" r="r" b="b"/>
             <a:pathLst>
-              <a:path w="41660" h="54887">
+              <a:path w="3123184" h="4114800">
                 <a:moveTo>
-                  <a:pt x="1000" y="3887"/>
+                  <a:pt x="74968" y="291402"/>
                 </a:moveTo>
                 <a:lnTo>
-                  <a:pt x="1000" y="13887"/>
-                </a:lnTo>
-                <a:lnTo>
-                  <a:pt x="6000" y="16774"/>
-                </a:lnTo>
-                <a:lnTo>
-                  <a:pt x="6000" y="13887"/>
-                </a:lnTo>
-                <a:lnTo>
-                  <a:pt x="6000" y="8887"/>
-                </a:lnTo>
-                <a:lnTo>
-                  <a:pt x="23321" y="18887"/>
-                </a:lnTo>
-                <a:lnTo>
-                  <a:pt x="14660" y="23887"/>
-                </a:lnTo>
-                <a:lnTo>
-                  <a:pt x="15000" y="23887"/>
-                </a:lnTo>
-                <a:lnTo>
-                  <a:pt x="32320" y="33887"/>
-                </a:lnTo>
-                <a:lnTo>
-                  <a:pt x="23660" y="38887"/>
-                </a:lnTo>
-                <a:lnTo>
-                  <a:pt x="32000" y="38887"/>
-                </a:lnTo>
-                <a:lnTo>
-                  <a:pt x="40660" y="33887"/>
-                </a:lnTo>
-                <a:lnTo>
-                  <a:pt x="23340" y="23887"/>
-                </a:lnTo>
-                <a:lnTo>
-                  <a:pt x="32000" y="18887"/>
-                </a:lnTo>
-                <a:lnTo>
-                  <a:pt x="31981" y="18887"/>
-                </a:lnTo>
-                <a:lnTo>
-                  <a:pt x="14660" y="8887"/>
-                </a:lnTo>
-                <a:lnTo>
-                  <a:pt x="6000" y="3887"/>
-                </a:lnTo>
-                <a:lnTo>
-                  <a:pt x="1000" y="1000"/>
+                  <a:pt x="74968" y="1041088"/>
+                </a:lnTo>
+                <a:lnTo>
+                  <a:pt x="449810" y="1257522"/>
+                </a:lnTo>
+                <a:lnTo>
+                  <a:pt x="449810" y="1041088"/>
+                </a:lnTo>
+                <a:lnTo>
+                  <a:pt x="449810" y="666245"/>
+                </a:lnTo>
+                <a:lnTo>
+                  <a:pt x="1748338" y="1415931"/>
+                </a:lnTo>
+                <a:lnTo>
+                  <a:pt x="1099036" y="1790774"/>
+                </a:lnTo>
+                <a:lnTo>
+                  <a:pt x="1124526" y="1790774"/>
+                </a:lnTo>
+                <a:lnTo>
+                  <a:pt x="2423054" y="2540459"/>
+                </a:lnTo>
+                <a:lnTo>
+                  <a:pt x="1773752" y="2915302"/>
+                </a:lnTo>
+                <a:lnTo>
+                  <a:pt x="2398989" y="2915302"/>
+                </a:lnTo>
+                <a:lnTo>
+                  <a:pt x="3048215" y="2540459"/>
+                </a:lnTo>
+                <a:lnTo>
+                  <a:pt x="1749762" y="1790774"/>
+                </a:lnTo>
+                <a:lnTo>
+                  <a:pt x="2398989" y="1415931"/>
+                </a:lnTo>
+                <a:lnTo>
+                  <a:pt x="2397564" y="1415931"/>
+                </a:lnTo>
+                <a:lnTo>
+                  <a:pt x="1099036" y="666245"/>
+                </a:lnTo>
+                <a:lnTo>
+                  <a:pt x="449810" y="291402"/>
+                </a:lnTo>
+                <a:lnTo>
+                  <a:pt x="74968" y="74968"/>
                 </a:lnTo>
                 <a:close/>
               </a:path>
-              <a:path w="41660" h="54887">
+              <a:path w="3123184" h="4114800">
                 <a:moveTo>
-                  <a:pt x="11000" y="38887"/>
+                  <a:pt x="824652" y="2915302"/>
                 </a:moveTo>
                 <a:lnTo>
-                  <a:pt x="16000" y="38887"/>
-                </a:lnTo>
-                <a:lnTo>
-                  <a:pt x="17340" y="38887"/>
-                </a:lnTo>
-                <a:lnTo>
-                  <a:pt x="26000" y="33887"/>
-                </a:lnTo>
-                <a:lnTo>
-                  <a:pt x="16000" y="33887"/>
-                </a:lnTo>
-                <a:lnTo>
-                  <a:pt x="16000" y="28887"/>
-                </a:lnTo>
-                <a:lnTo>
-                  <a:pt x="11000" y="26000"/>
+                  <a:pt x="1199494" y="2915302"/>
+                </a:lnTo>
+                <a:lnTo>
+                  <a:pt x="1299952" y="2915302"/>
+                </a:lnTo>
+                <a:lnTo>
+                  <a:pt x="1949178" y="2540459"/>
+                </a:lnTo>
+                <a:lnTo>
+                  <a:pt x="1199494" y="2540459"/>
+                </a:lnTo>
+                <a:lnTo>
+                  <a:pt x="1199494" y="2165617"/>
+                </a:lnTo>
+                <a:lnTo>
+                  <a:pt x="824652" y="1949182"/>
                 </a:lnTo>
                 <a:close/>
               </a:path>
-              <a:path w="41660" h="54887">
+              <a:path w="3123184" h="4114800">
                 <a:moveTo>
-                  <a:pt x="6000" y="21774"/>
+                  <a:pt x="449810" y="1632365"/>
                 </a:moveTo>
                 <a:lnTo>
-                  <a:pt x="1000" y="18887"/>
-                </a:lnTo>
-                <a:lnTo>
-                  <a:pt x="1000" y="43887"/>
-                </a:lnTo>
-                <a:lnTo>
-                  <a:pt x="1000" y="48887"/>
-                </a:lnTo>
-                <a:lnTo>
-                  <a:pt x="1000" y="53887"/>
-                </a:lnTo>
-                <a:lnTo>
-                  <a:pt x="18113" y="53887"/>
-                </a:lnTo>
-                <a:lnTo>
-                  <a:pt x="21000" y="48887"/>
-                </a:lnTo>
-                <a:lnTo>
-                  <a:pt x="6000" y="48887"/>
-                </a:lnTo>
-                <a:lnTo>
-                  <a:pt x="6000" y="43887"/>
+                  <a:pt x="74968" y="1415931"/>
+                </a:lnTo>
+                <a:lnTo>
+                  <a:pt x="74968" y="3290145"/>
+                </a:lnTo>
+                <a:lnTo>
+                  <a:pt x="74968" y="3664988"/>
+                </a:lnTo>
+                <a:lnTo>
+                  <a:pt x="74968" y="4039831"/>
+                </a:lnTo>
+                <a:lnTo>
+                  <a:pt x="1357902" y="4039831"/>
+                </a:lnTo>
+                <a:lnTo>
+                  <a:pt x="1574336" y="3664988"/>
+                </a:lnTo>
+                <a:lnTo>
+                  <a:pt x="449810" y="3664988"/>
+                </a:lnTo>
+                <a:lnTo>
+                  <a:pt x="449810" y="3290145"/>
                 </a:lnTo>
                 <a:close/>
               </a:path>
-              <a:path w="41660" h="54887">
+              <a:path w="3123184" h="4114800">
                 <a:moveTo>
-                  <a:pt x="23113" y="53887"/>
+                  <a:pt x="1732744" y="4039831"/>
                 </a:moveTo>
                 <a:lnTo>
-                  <a:pt x="26000" y="48887"/>
-                </a:lnTo>
-                <a:lnTo>
-                  <a:pt x="23000" y="48887"/>
-                </a:lnTo>
-                <a:lnTo>
-                  <a:pt x="20113" y="53887"/>
+                  <a:pt x="1949178" y="3664988"/>
+                </a:lnTo>
+                <a:lnTo>
+                  <a:pt x="1724273" y="3664988"/>
+                </a:lnTo>
+                <a:lnTo>
+                  <a:pt x="1507839" y="4039831"/>
                 </a:lnTo>
                 <a:close/>
               </a:path>
@@ -5603,129 +5603,129 @@
             <a:cxnLst/>
             <a:rect l="0" t="0" r="r" b="b"/>
             <a:pathLst>
-              <a:path w="41660" h="54887">
+              <a:path w="192786" h="254000">
                 <a:moveTo>
-                  <a:pt x="1000" y="3887"/>
+                  <a:pt x="4627" y="17987"/>
                 </a:moveTo>
                 <a:lnTo>
-                  <a:pt x="1000" y="13887"/>
-                </a:lnTo>
-                <a:lnTo>
-                  <a:pt x="6000" y="16774"/>
-                </a:lnTo>
-                <a:lnTo>
-                  <a:pt x="6000" y="13887"/>
-                </a:lnTo>
-                <a:lnTo>
-                  <a:pt x="6000" y="8887"/>
-                </a:lnTo>
-                <a:lnTo>
-                  <a:pt x="23321" y="18887"/>
-                </a:lnTo>
-                <a:lnTo>
-                  <a:pt x="14660" y="23887"/>
-                </a:lnTo>
-                <a:lnTo>
-                  <a:pt x="15000" y="23887"/>
-                </a:lnTo>
-                <a:lnTo>
-                  <a:pt x="32320" y="33887"/>
-                </a:lnTo>
-                <a:lnTo>
-                  <a:pt x="23660" y="38887"/>
-                </a:lnTo>
-                <a:lnTo>
-                  <a:pt x="32000" y="38887"/>
-                </a:lnTo>
-                <a:lnTo>
-                  <a:pt x="40660" y="33887"/>
-                </a:lnTo>
-                <a:lnTo>
-                  <a:pt x="23340" y="23887"/>
-                </a:lnTo>
-                <a:lnTo>
-                  <a:pt x="32000" y="18887"/>
-                </a:lnTo>
-                <a:lnTo>
-                  <a:pt x="31981" y="18887"/>
-                </a:lnTo>
-                <a:lnTo>
-                  <a:pt x="14660" y="8887"/>
-                </a:lnTo>
-                <a:lnTo>
-                  <a:pt x="6000" y="3887"/>
-                </a:lnTo>
-                <a:lnTo>
-                  <a:pt x="1000" y="1000"/>
+                  <a:pt x="4627" y="64264"/>
+                </a:lnTo>
+                <a:lnTo>
+                  <a:pt x="27765" y="77624"/>
+                </a:lnTo>
+                <a:lnTo>
+                  <a:pt x="27765" y="64264"/>
+                </a:lnTo>
+                <a:lnTo>
+                  <a:pt x="27765" y="41126"/>
+                </a:lnTo>
+                <a:lnTo>
+                  <a:pt x="107920" y="87403"/>
+                </a:lnTo>
+                <a:lnTo>
+                  <a:pt x="67840" y="110541"/>
+                </a:lnTo>
+                <a:lnTo>
+                  <a:pt x="69414" y="110541"/>
+                </a:lnTo>
+                <a:lnTo>
+                  <a:pt x="149568" y="156818"/>
+                </a:lnTo>
+                <a:lnTo>
+                  <a:pt x="109489" y="179956"/>
+                </a:lnTo>
+                <a:lnTo>
+                  <a:pt x="148083" y="179956"/>
+                </a:lnTo>
+                <a:lnTo>
+                  <a:pt x="188158" y="156818"/>
+                </a:lnTo>
+                <a:lnTo>
+                  <a:pt x="108008" y="110541"/>
+                </a:lnTo>
+                <a:lnTo>
+                  <a:pt x="148083" y="87403"/>
+                </a:lnTo>
+                <a:lnTo>
+                  <a:pt x="147995" y="87403"/>
+                </a:lnTo>
+                <a:lnTo>
+                  <a:pt x="67840" y="41126"/>
+                </a:lnTo>
+                <a:lnTo>
+                  <a:pt x="27765" y="17987"/>
+                </a:lnTo>
+                <a:lnTo>
+                  <a:pt x="4627" y="4627"/>
                 </a:lnTo>
                 <a:close/>
               </a:path>
-              <a:path w="41660" h="54887">
+              <a:path w="192786" h="254000">
                 <a:moveTo>
-                  <a:pt x="11000" y="38887"/>
+                  <a:pt x="50903" y="179956"/>
                 </a:moveTo>
                 <a:lnTo>
-                  <a:pt x="16000" y="38887"/>
-                </a:lnTo>
-                <a:lnTo>
-                  <a:pt x="17340" y="38887"/>
-                </a:lnTo>
-                <a:lnTo>
-                  <a:pt x="26000" y="33887"/>
-                </a:lnTo>
-                <a:lnTo>
-                  <a:pt x="16000" y="33887"/>
-                </a:lnTo>
-                <a:lnTo>
-                  <a:pt x="16000" y="28887"/>
-                </a:lnTo>
-                <a:lnTo>
-                  <a:pt x="11000" y="26000"/>
+                  <a:pt x="74041" y="179956"/>
+                </a:lnTo>
+                <a:lnTo>
+                  <a:pt x="80242" y="179956"/>
+                </a:lnTo>
+                <a:lnTo>
+                  <a:pt x="120317" y="156818"/>
+                </a:lnTo>
+                <a:lnTo>
+                  <a:pt x="74041" y="156818"/>
+                </a:lnTo>
+                <a:lnTo>
+                  <a:pt x="74041" y="133680"/>
+                </a:lnTo>
+                <a:lnTo>
+                  <a:pt x="50903" y="120319"/>
                 </a:lnTo>
                 <a:close/>
               </a:path>
-              <a:path w="41660" h="54887">
+              <a:path w="192786" h="254000">
                 <a:moveTo>
-                  <a:pt x="6000" y="21774"/>
+                  <a:pt x="27765" y="100763"/>
                 </a:moveTo>
                 <a:lnTo>
-                  <a:pt x="1000" y="18887"/>
-                </a:lnTo>
-                <a:lnTo>
-                  <a:pt x="1000" y="43887"/>
-                </a:lnTo>
-                <a:lnTo>
-                  <a:pt x="1000" y="48887"/>
-                </a:lnTo>
-                <a:lnTo>
-                  <a:pt x="1000" y="53887"/>
-                </a:lnTo>
-                <a:lnTo>
-                  <a:pt x="18113" y="53887"/>
-                </a:lnTo>
-                <a:lnTo>
-                  <a:pt x="21000" y="48887"/>
-                </a:lnTo>
-                <a:lnTo>
-                  <a:pt x="6000" y="48887"/>
-                </a:lnTo>
-                <a:lnTo>
-                  <a:pt x="6000" y="43887"/>
+                  <a:pt x="4627" y="87403"/>
+                </a:lnTo>
+                <a:lnTo>
+                  <a:pt x="4627" y="203095"/>
+                </a:lnTo>
+                <a:lnTo>
+                  <a:pt x="4627" y="226233"/>
+                </a:lnTo>
+                <a:lnTo>
+                  <a:pt x="4627" y="249372"/>
+                </a:lnTo>
+                <a:lnTo>
+                  <a:pt x="83819" y="249372"/>
+                </a:lnTo>
+                <a:lnTo>
+                  <a:pt x="97179" y="226233"/>
+                </a:lnTo>
+                <a:lnTo>
+                  <a:pt x="27765" y="226233"/>
+                </a:lnTo>
+                <a:lnTo>
+                  <a:pt x="27765" y="203095"/>
                 </a:lnTo>
                 <a:close/>
               </a:path>
-              <a:path w="41660" h="54887">
+              <a:path w="192786" h="254000">
                 <a:moveTo>
-                  <a:pt x="23113" y="53887"/>
+                  <a:pt x="106957" y="249372"/>
                 </a:moveTo>
                 <a:lnTo>
-                  <a:pt x="26000" y="48887"/>
-                </a:lnTo>
-                <a:lnTo>
-                  <a:pt x="23000" y="48887"/>
-                </a:lnTo>
-                <a:lnTo>
-                  <a:pt x="20113" y="53887"/>
+                  <a:pt x="120317" y="226233"/>
+                </a:lnTo>
+                <a:lnTo>
+                  <a:pt x="106434" y="226233"/>
+                </a:lnTo>
+                <a:lnTo>
+                  <a:pt x="93075" y="249372"/>
                 </a:lnTo>
                 <a:close/>
               </a:path>
@@ -6017,129 +6017,129 @@
             <a:cxnLst/>
             <a:rect l="0" t="0" r="r" b="b"/>
             <a:pathLst>
-              <a:path w="41660" h="54887">
+              <a:path w="192786" h="254000">
                 <a:moveTo>
-                  <a:pt x="1000" y="3887"/>
+                  <a:pt x="4627" y="17987"/>
                 </a:moveTo>
                 <a:lnTo>
-                  <a:pt x="1000" y="13887"/>
-                </a:lnTo>
-                <a:lnTo>
-                  <a:pt x="6000" y="16774"/>
-                </a:lnTo>
-                <a:lnTo>
-                  <a:pt x="6000" y="13887"/>
-                </a:lnTo>
-                <a:lnTo>
-                  <a:pt x="6000" y="8887"/>
-                </a:lnTo>
-                <a:lnTo>
-                  <a:pt x="23321" y="18887"/>
-                </a:lnTo>
-                <a:lnTo>
-                  <a:pt x="14660" y="23887"/>
-                </a:lnTo>
-                <a:lnTo>
-                  <a:pt x="15000" y="23887"/>
-                </a:lnTo>
-                <a:lnTo>
-                  <a:pt x="32320" y="33887"/>
-                </a:lnTo>
-                <a:lnTo>
-                  <a:pt x="23660" y="38887"/>
-                </a:lnTo>
-                <a:lnTo>
-                  <a:pt x="32000" y="38887"/>
-                </a:lnTo>
-                <a:lnTo>
-                  <a:pt x="40660" y="33887"/>
-                </a:lnTo>
-                <a:lnTo>
-                  <a:pt x="23340" y="23887"/>
-                </a:lnTo>
-                <a:lnTo>
-                  <a:pt x="32000" y="18887"/>
-                </a:lnTo>
-                <a:lnTo>
-                  <a:pt x="31981" y="18887"/>
-                </a:lnTo>
-                <a:lnTo>
-                  <a:pt x="14660" y="8887"/>
-                </a:lnTo>
-                <a:lnTo>
-                  <a:pt x="6000" y="3887"/>
-                </a:lnTo>
-                <a:lnTo>
-                  <a:pt x="1000" y="1000"/>
+                  <a:pt x="4627" y="64264"/>
+                </a:lnTo>
+                <a:lnTo>
+                  <a:pt x="27765" y="77624"/>
+                </a:lnTo>
+                <a:lnTo>
+                  <a:pt x="27765" y="64264"/>
+                </a:lnTo>
+                <a:lnTo>
+                  <a:pt x="27765" y="41126"/>
+                </a:lnTo>
+                <a:lnTo>
+                  <a:pt x="107920" y="87403"/>
+                </a:lnTo>
+                <a:lnTo>
+                  <a:pt x="67840" y="110541"/>
+                </a:lnTo>
+                <a:lnTo>
+                  <a:pt x="69414" y="110541"/>
+                </a:lnTo>
+                <a:lnTo>
+                  <a:pt x="149568" y="156818"/>
+                </a:lnTo>
+                <a:lnTo>
+                  <a:pt x="109489" y="179956"/>
+                </a:lnTo>
+                <a:lnTo>
+                  <a:pt x="148083" y="179956"/>
+                </a:lnTo>
+                <a:lnTo>
+                  <a:pt x="188158" y="156818"/>
+                </a:lnTo>
+                <a:lnTo>
+                  <a:pt x="108008" y="110541"/>
+                </a:lnTo>
+                <a:lnTo>
+                  <a:pt x="148083" y="87403"/>
+                </a:lnTo>
+                <a:lnTo>
+                  <a:pt x="147995" y="87403"/>
+                </a:lnTo>
+                <a:lnTo>
+                  <a:pt x="67840" y="41126"/>
+                </a:lnTo>
+                <a:lnTo>
+                  <a:pt x="27765" y="17987"/>
+                </a:lnTo>
+                <a:lnTo>
+                  <a:pt x="4627" y="4627"/>
                 </a:lnTo>
                 <a:close/>
               </a:path>
-              <a:path w="41660" h="54887">
+              <a:path w="192786" h="254000">
                 <a:moveTo>
-                  <a:pt x="11000" y="38887"/>
+                  <a:pt x="50903" y="179956"/>
                 </a:moveTo>
                 <a:lnTo>
-                  <a:pt x="16000" y="38887"/>
-                </a:lnTo>
-                <a:lnTo>
-                  <a:pt x="17340" y="38887"/>
-                </a:lnTo>
-                <a:lnTo>
-                  <a:pt x="26000" y="33887"/>
-                </a:lnTo>
-                <a:lnTo>
-                  <a:pt x="16000" y="33887"/>
-                </a:lnTo>
-                <a:lnTo>
-                  <a:pt x="16000" y="28887"/>
-                </a:lnTo>
-                <a:lnTo>
-                  <a:pt x="11000" y="26000"/>
+                  <a:pt x="74041" y="179956"/>
+                </a:lnTo>
+                <a:lnTo>
+                  <a:pt x="80242" y="179956"/>
+                </a:lnTo>
+                <a:lnTo>
+                  <a:pt x="120317" y="156818"/>
+                </a:lnTo>
+                <a:lnTo>
+                  <a:pt x="74041" y="156818"/>
+                </a:lnTo>
+                <a:lnTo>
+                  <a:pt x="74041" y="133680"/>
+                </a:lnTo>
+                <a:lnTo>
+                  <a:pt x="50903" y="120319"/>
                 </a:lnTo>
                 <a:close/>
               </a:path>
-              <a:path w="41660" h="54887">
+              <a:path w="192786" h="254000">
                 <a:moveTo>
-                  <a:pt x="6000" y="21774"/>
+                  <a:pt x="27765" y="100763"/>
                 </a:moveTo>
                 <a:lnTo>
-                  <a:pt x="1000" y="18887"/>
-                </a:lnTo>
-                <a:lnTo>
-                  <a:pt x="1000" y="43887"/>
-                </a:lnTo>
-                <a:lnTo>
-                  <a:pt x="1000" y="48887"/>
-                </a:lnTo>
-                <a:lnTo>
-                  <a:pt x="1000" y="53887"/>
-                </a:lnTo>
-                <a:lnTo>
-                  <a:pt x="18113" y="53887"/>
-                </a:lnTo>
-                <a:lnTo>
-                  <a:pt x="21000" y="48887"/>
-                </a:lnTo>
-                <a:lnTo>
-                  <a:pt x="6000" y="48887"/>
-                </a:lnTo>
-                <a:lnTo>
-                  <a:pt x="6000" y="43887"/>
+                  <a:pt x="4627" y="87403"/>
+                </a:lnTo>
+                <a:lnTo>
+                  <a:pt x="4627" y="203095"/>
+                </a:lnTo>
+                <a:lnTo>
+                  <a:pt x="4627" y="226233"/>
+                </a:lnTo>
+                <a:lnTo>
+                  <a:pt x="4627" y="249372"/>
+                </a:lnTo>
+                <a:lnTo>
+                  <a:pt x="83819" y="249372"/>
+                </a:lnTo>
+                <a:lnTo>
+                  <a:pt x="97179" y="226233"/>
+                </a:lnTo>
+                <a:lnTo>
+                  <a:pt x="27765" y="226233"/>
+                </a:lnTo>
+                <a:lnTo>
+                  <a:pt x="27765" y="203095"/>
                 </a:lnTo>
                 <a:close/>
               </a:path>
-              <a:path w="41660" h="54887">
+              <a:path w="192786" h="254000">
                 <a:moveTo>
-                  <a:pt x="23113" y="53887"/>
+                  <a:pt x="106957" y="249372"/>
                 </a:moveTo>
                 <a:lnTo>
-                  <a:pt x="26000" y="48887"/>
-                </a:lnTo>
-                <a:lnTo>
-                  <a:pt x="23000" y="48887"/>
-                </a:lnTo>
-                <a:lnTo>
-                  <a:pt x="20113" y="53887"/>
+                  <a:pt x="120317" y="226233"/>
+                </a:lnTo>
+                <a:lnTo>
+                  <a:pt x="106434" y="226233"/>
+                </a:lnTo>
+                <a:lnTo>
+                  <a:pt x="93075" y="249372"/>
                 </a:lnTo>
                 <a:close/>
               </a:path>

--- a/bigtree/samples/bigtree_lab_charts.pptx
+++ b/bigtree/samples/bigtree_lab_charts.pptx
@@ -3398,64 +3398,62 @@
             <a:pathLst>
               <a:path w="347028" h="457200">
                 <a:moveTo>
-                  <a:pt x="8330" y="32378"/>
+                  <a:pt x="8333" y="32378"/>
                 </a:moveTo>
                 <a:lnTo>
-                  <a:pt x="8330" y="115676"/>
-                </a:lnTo>
-                <a:lnTo>
-                  <a:pt x="49980" y="139724"/>
-                </a:lnTo>
-                <a:lnTo>
-                  <a:pt x="49980" y="115676"/>
-                </a:lnTo>
-                <a:lnTo>
-                  <a:pt x="49980" y="74027"/>
-                </a:lnTo>
-                <a:lnTo>
-                  <a:pt x="194264" y="157325"/>
-                </a:lnTo>
-                <a:lnTo>
-                  <a:pt x="122117" y="198974"/>
-                </a:lnTo>
-                <a:lnTo>
-                  <a:pt x="124950" y="198974"/>
-                </a:lnTo>
-                <a:lnTo>
-                  <a:pt x="269234" y="282273"/>
+                  <a:pt x="8333" y="115676"/>
+                </a:lnTo>
+                <a:lnTo>
+                  <a:pt x="49982" y="139724"/>
+                </a:lnTo>
+                <a:lnTo>
+                  <a:pt x="49982" y="115676"/>
+                </a:lnTo>
+                <a:lnTo>
+                  <a:pt x="49982" y="74027"/>
+                </a:lnTo>
+                <a:lnTo>
+                  <a:pt x="194263" y="157325"/>
+                </a:lnTo>
+                <a:lnTo>
+                  <a:pt x="122118" y="198974"/>
+                </a:lnTo>
+                <a:lnTo>
+                  <a:pt x="124951" y="198974"/>
+                </a:lnTo>
+                <a:lnTo>
+                  <a:pt x="269232" y="282273"/>
                 </a:lnTo>
                 <a:lnTo>
                   <a:pt x="197087" y="323922"/>
                 </a:lnTo>
                 <a:lnTo>
-                  <a:pt x="266560" y="323922"/>
-                </a:lnTo>
-                <a:lnTo>
-                  <a:pt x="338697" y="282273"/>
-                </a:lnTo>
-                <a:lnTo>
-                  <a:pt x="194422" y="198974"/>
-                </a:lnTo>
-                <a:lnTo>
-                  <a:pt x="266560" y="157325"/>
-                </a:lnTo>
-                <a:lnTo>
-                  <a:pt x="266401" y="157325"/>
-                </a:lnTo>
-                <a:lnTo>
-                  <a:pt x="122117" y="74027"/>
-                </a:lnTo>
-                <a:lnTo>
-                  <a:pt x="49980" y="32378"/>
-                </a:lnTo>
-                <a:lnTo>
-                  <a:pt x="8330" y="8329"/>
+                  <a:pt x="266558" y="323922"/>
+                </a:lnTo>
+                <a:lnTo>
+                  <a:pt x="338694" y="282273"/>
+                </a:lnTo>
+                <a:lnTo>
+                  <a:pt x="194421" y="198974"/>
+                </a:lnTo>
+                <a:lnTo>
+                  <a:pt x="266558" y="157325"/>
+                </a:lnTo>
+                <a:lnTo>
+                  <a:pt x="266400" y="157325"/>
+                </a:lnTo>
+                <a:lnTo>
+                  <a:pt x="122118" y="74027"/>
+                </a:lnTo>
+                <a:lnTo>
+                  <a:pt x="49982" y="32378"/>
+                </a:lnTo>
+                <a:lnTo>
+                  <a:pt x="8333" y="8329"/>
                 </a:lnTo>
                 <a:close/>
-              </a:path>
-              <a:path w="347028" h="457200">
                 <a:moveTo>
-                  <a:pt x="91630" y="323922"/>
+                  <a:pt x="91631" y="323922"/>
                 </a:moveTo>
                 <a:lnTo>
                   <a:pt x="133280" y="323922"/>
@@ -3464,7 +3462,7 @@
                   <a:pt x="144442" y="323922"/>
                 </a:lnTo>
                 <a:lnTo>
-                  <a:pt x="216580" y="282273"/>
+                  <a:pt x="216579" y="282273"/>
                 </a:lnTo>
                 <a:lnTo>
                   <a:pt x="133280" y="282273"/>
@@ -3473,25 +3471,23 @@
                   <a:pt x="133280" y="240624"/>
                 </a:lnTo>
                 <a:lnTo>
-                  <a:pt x="91630" y="216575"/>
+                  <a:pt x="91631" y="216575"/>
                 </a:lnTo>
                 <a:close/>
-              </a:path>
-              <a:path w="347028" h="457200">
                 <a:moveTo>
-                  <a:pt x="49980" y="181373"/>
+                  <a:pt x="49982" y="181373"/>
                 </a:moveTo>
                 <a:lnTo>
-                  <a:pt x="8330" y="157325"/>
-                </a:lnTo>
-                <a:lnTo>
-                  <a:pt x="8330" y="365571"/>
-                </a:lnTo>
-                <a:lnTo>
-                  <a:pt x="8330" y="407220"/>
-                </a:lnTo>
-                <a:lnTo>
-                  <a:pt x="8330" y="448870"/>
+                  <a:pt x="8333" y="157325"/>
+                </a:lnTo>
+                <a:lnTo>
+                  <a:pt x="8333" y="365571"/>
+                </a:lnTo>
+                <a:lnTo>
+                  <a:pt x="8333" y="407220"/>
+                </a:lnTo>
+                <a:lnTo>
+                  <a:pt x="8333" y="448870"/>
                 </a:lnTo>
                 <a:lnTo>
                   <a:pt x="150881" y="448870"/>
@@ -3500,22 +3496,20 @@
                   <a:pt x="174930" y="407220"/>
                 </a:lnTo>
                 <a:lnTo>
-                  <a:pt x="49980" y="407220"/>
-                </a:lnTo>
-                <a:lnTo>
-                  <a:pt x="49980" y="365571"/>
+                  <a:pt x="49982" y="407220"/>
+                </a:lnTo>
+                <a:lnTo>
+                  <a:pt x="49982" y="365571"/>
                 </a:lnTo>
                 <a:close/>
-              </a:path>
-              <a:path w="347028" h="457200">
                 <a:moveTo>
                   <a:pt x="192531" y="448870"/>
                 </a:moveTo>
                 <a:lnTo>
-                  <a:pt x="216580" y="407220"/>
-                </a:lnTo>
-                <a:lnTo>
-                  <a:pt x="191590" y="407220"/>
+                  <a:pt x="216579" y="407220"/>
+                </a:lnTo>
+                <a:lnTo>
+                  <a:pt x="191589" y="407220"/>
                 </a:lnTo>
                 <a:lnTo>
                   <a:pt x="167541" y="448870"/>
@@ -3923,22 +3917,22 @@
             <a:pathLst>
               <a:path w="3123184" h="4114800">
                 <a:moveTo>
-                  <a:pt x="74968" y="291402"/>
+                  <a:pt x="74968" y="291406"/>
                 </a:moveTo>
                 <a:lnTo>
-                  <a:pt x="74968" y="1041088"/>
-                </a:lnTo>
-                <a:lnTo>
-                  <a:pt x="449810" y="1257522"/>
-                </a:lnTo>
-                <a:lnTo>
-                  <a:pt x="449810" y="1041088"/>
-                </a:lnTo>
-                <a:lnTo>
-                  <a:pt x="449810" y="666245"/>
-                </a:lnTo>
-                <a:lnTo>
-                  <a:pt x="1748338" y="1415931"/>
+                  <a:pt x="74968" y="1041090"/>
+                </a:lnTo>
+                <a:lnTo>
+                  <a:pt x="449810" y="1257524"/>
+                </a:lnTo>
+                <a:lnTo>
+                  <a:pt x="449810" y="1041090"/>
+                </a:lnTo>
+                <a:lnTo>
+                  <a:pt x="449810" y="666248"/>
+                </a:lnTo>
+                <a:lnTo>
+                  <a:pt x="1748338" y="1415932"/>
                 </a:lnTo>
                 <a:lnTo>
                   <a:pt x="1099036" y="1790774"/>
@@ -3947,103 +3941,97 @@
                   <a:pt x="1124526" y="1790774"/>
                 </a:lnTo>
                 <a:lnTo>
-                  <a:pt x="2423054" y="2540459"/>
-                </a:lnTo>
-                <a:lnTo>
-                  <a:pt x="1773752" y="2915302"/>
-                </a:lnTo>
-                <a:lnTo>
-                  <a:pt x="2398989" y="2915302"/>
-                </a:lnTo>
-                <a:lnTo>
-                  <a:pt x="3048215" y="2540459"/>
+                  <a:pt x="2423054" y="2540458"/>
+                </a:lnTo>
+                <a:lnTo>
+                  <a:pt x="1773752" y="2915301"/>
+                </a:lnTo>
+                <a:lnTo>
+                  <a:pt x="2398989" y="2915301"/>
+                </a:lnTo>
+                <a:lnTo>
+                  <a:pt x="3048215" y="2540458"/>
                 </a:lnTo>
                 <a:lnTo>
                   <a:pt x="1749762" y="1790774"/>
                 </a:lnTo>
                 <a:lnTo>
-                  <a:pt x="2398989" y="1415931"/>
-                </a:lnTo>
-                <a:lnTo>
-                  <a:pt x="2397564" y="1415931"/>
-                </a:lnTo>
-                <a:lnTo>
-                  <a:pt x="1099036" y="666245"/>
-                </a:lnTo>
-                <a:lnTo>
-                  <a:pt x="449810" y="291402"/>
-                </a:lnTo>
-                <a:lnTo>
-                  <a:pt x="74968" y="74968"/>
+                  <a:pt x="2398989" y="1415932"/>
+                </a:lnTo>
+                <a:lnTo>
+                  <a:pt x="2397564" y="1415932"/>
+                </a:lnTo>
+                <a:lnTo>
+                  <a:pt x="1099036" y="666248"/>
+                </a:lnTo>
+                <a:lnTo>
+                  <a:pt x="449810" y="291406"/>
+                </a:lnTo>
+                <a:lnTo>
+                  <a:pt x="74968" y="74972"/>
                 </a:lnTo>
                 <a:close/>
-              </a:path>
-              <a:path w="3123184" h="4114800">
                 <a:moveTo>
-                  <a:pt x="824652" y="2915302"/>
+                  <a:pt x="824652" y="2915301"/>
                 </a:moveTo>
                 <a:lnTo>
-                  <a:pt x="1199494" y="2915302"/>
-                </a:lnTo>
-                <a:lnTo>
-                  <a:pt x="1299952" y="2915302"/>
-                </a:lnTo>
-                <a:lnTo>
-                  <a:pt x="1949178" y="2540459"/>
-                </a:lnTo>
-                <a:lnTo>
-                  <a:pt x="1199494" y="2540459"/>
-                </a:lnTo>
-                <a:lnTo>
-                  <a:pt x="1199494" y="2165617"/>
-                </a:lnTo>
-                <a:lnTo>
-                  <a:pt x="824652" y="1949182"/>
+                  <a:pt x="1199494" y="2915301"/>
+                </a:lnTo>
+                <a:lnTo>
+                  <a:pt x="1299952" y="2915301"/>
+                </a:lnTo>
+                <a:lnTo>
+                  <a:pt x="1949178" y="2540458"/>
+                </a:lnTo>
+                <a:lnTo>
+                  <a:pt x="1199494" y="2540458"/>
+                </a:lnTo>
+                <a:lnTo>
+                  <a:pt x="1199494" y="2165616"/>
+                </a:lnTo>
+                <a:lnTo>
+                  <a:pt x="824652" y="1949183"/>
                 </a:lnTo>
                 <a:close/>
-              </a:path>
-              <a:path w="3123184" h="4114800">
                 <a:moveTo>
-                  <a:pt x="449810" y="1632365"/>
+                  <a:pt x="449810" y="1632366"/>
                 </a:moveTo>
                 <a:lnTo>
-                  <a:pt x="74968" y="1415931"/>
-                </a:lnTo>
-                <a:lnTo>
-                  <a:pt x="74968" y="3290145"/>
-                </a:lnTo>
-                <a:lnTo>
-                  <a:pt x="74968" y="3664988"/>
-                </a:lnTo>
-                <a:lnTo>
-                  <a:pt x="74968" y="4039831"/>
-                </a:lnTo>
-                <a:lnTo>
-                  <a:pt x="1357902" y="4039831"/>
-                </a:lnTo>
-                <a:lnTo>
-                  <a:pt x="1574336" y="3664988"/>
-                </a:lnTo>
-                <a:lnTo>
-                  <a:pt x="449810" y="3664988"/>
-                </a:lnTo>
-                <a:lnTo>
-                  <a:pt x="449810" y="3290145"/>
+                  <a:pt x="74968" y="1415932"/>
+                </a:lnTo>
+                <a:lnTo>
+                  <a:pt x="74968" y="3290143"/>
+                </a:lnTo>
+                <a:lnTo>
+                  <a:pt x="74968" y="3664985"/>
+                </a:lnTo>
+                <a:lnTo>
+                  <a:pt x="74968" y="4039827"/>
+                </a:lnTo>
+                <a:lnTo>
+                  <a:pt x="1357902" y="4039827"/>
+                </a:lnTo>
+                <a:lnTo>
+                  <a:pt x="1574336" y="3664985"/>
+                </a:lnTo>
+                <a:lnTo>
+                  <a:pt x="449810" y="3664985"/>
+                </a:lnTo>
+                <a:lnTo>
+                  <a:pt x="449810" y="3290143"/>
                 </a:lnTo>
                 <a:close/>
-              </a:path>
-              <a:path w="3123184" h="4114800">
                 <a:moveTo>
-                  <a:pt x="1732744" y="4039831"/>
+                  <a:pt x="1732744" y="4039827"/>
                 </a:moveTo>
                 <a:lnTo>
-                  <a:pt x="1949178" y="3664988"/>
-                </a:lnTo>
-                <a:lnTo>
-                  <a:pt x="1724273" y="3664988"/>
-                </a:lnTo>
-                <a:lnTo>
-                  <a:pt x="1507839" y="4039831"/>
+                  <a:pt x="1949178" y="3664985"/>
+                </a:lnTo>
+                <a:lnTo>
+                  <a:pt x="1724273" y="3664985"/>
+                </a:lnTo>
+                <a:lnTo>
+                  <a:pt x="1507839" y="4039827"/>
                 </a:lnTo>
                 <a:close/>
               </a:path>
@@ -4346,22 +4334,22 @@
             <a:pathLst>
               <a:path w="3123184" h="4114800">
                 <a:moveTo>
-                  <a:pt x="74968" y="291402"/>
+                  <a:pt x="74968" y="291406"/>
                 </a:moveTo>
                 <a:lnTo>
-                  <a:pt x="74968" y="1041088"/>
-                </a:lnTo>
-                <a:lnTo>
-                  <a:pt x="449810" y="1257522"/>
-                </a:lnTo>
-                <a:lnTo>
-                  <a:pt x="449810" y="1041088"/>
-                </a:lnTo>
-                <a:lnTo>
-                  <a:pt x="449810" y="666245"/>
-                </a:lnTo>
-                <a:lnTo>
-                  <a:pt x="1748338" y="1415931"/>
+                  <a:pt x="74968" y="1041090"/>
+                </a:lnTo>
+                <a:lnTo>
+                  <a:pt x="449810" y="1257524"/>
+                </a:lnTo>
+                <a:lnTo>
+                  <a:pt x="449810" y="1041090"/>
+                </a:lnTo>
+                <a:lnTo>
+                  <a:pt x="449810" y="666248"/>
+                </a:lnTo>
+                <a:lnTo>
+                  <a:pt x="1748338" y="1415932"/>
                 </a:lnTo>
                 <a:lnTo>
                   <a:pt x="1099036" y="1790774"/>
@@ -4370,103 +4358,97 @@
                   <a:pt x="1124526" y="1790774"/>
                 </a:lnTo>
                 <a:lnTo>
-                  <a:pt x="2423054" y="2540459"/>
-                </a:lnTo>
-                <a:lnTo>
-                  <a:pt x="1773752" y="2915302"/>
-                </a:lnTo>
-                <a:lnTo>
-                  <a:pt x="2398989" y="2915302"/>
-                </a:lnTo>
-                <a:lnTo>
-                  <a:pt x="3048215" y="2540459"/>
+                  <a:pt x="2423054" y="2540458"/>
+                </a:lnTo>
+                <a:lnTo>
+                  <a:pt x="1773752" y="2915301"/>
+                </a:lnTo>
+                <a:lnTo>
+                  <a:pt x="2398989" y="2915301"/>
+                </a:lnTo>
+                <a:lnTo>
+                  <a:pt x="3048215" y="2540458"/>
                 </a:lnTo>
                 <a:lnTo>
                   <a:pt x="1749762" y="1790774"/>
                 </a:lnTo>
                 <a:lnTo>
-                  <a:pt x="2398989" y="1415931"/>
-                </a:lnTo>
-                <a:lnTo>
-                  <a:pt x="2397564" y="1415931"/>
-                </a:lnTo>
-                <a:lnTo>
-                  <a:pt x="1099036" y="666245"/>
-                </a:lnTo>
-                <a:lnTo>
-                  <a:pt x="449810" y="291402"/>
-                </a:lnTo>
-                <a:lnTo>
-                  <a:pt x="74968" y="74968"/>
+                  <a:pt x="2398989" y="1415932"/>
+                </a:lnTo>
+                <a:lnTo>
+                  <a:pt x="2397564" y="1415932"/>
+                </a:lnTo>
+                <a:lnTo>
+                  <a:pt x="1099036" y="666248"/>
+                </a:lnTo>
+                <a:lnTo>
+                  <a:pt x="449810" y="291406"/>
+                </a:lnTo>
+                <a:lnTo>
+                  <a:pt x="74968" y="74972"/>
                 </a:lnTo>
                 <a:close/>
-              </a:path>
-              <a:path w="3123184" h="4114800">
                 <a:moveTo>
-                  <a:pt x="824652" y="2915302"/>
+                  <a:pt x="824652" y="2915301"/>
                 </a:moveTo>
                 <a:lnTo>
-                  <a:pt x="1199494" y="2915302"/>
-                </a:lnTo>
-                <a:lnTo>
-                  <a:pt x="1299952" y="2915302"/>
-                </a:lnTo>
-                <a:lnTo>
-                  <a:pt x="1949178" y="2540459"/>
-                </a:lnTo>
-                <a:lnTo>
-                  <a:pt x="1199494" y="2540459"/>
-                </a:lnTo>
-                <a:lnTo>
-                  <a:pt x="1199494" y="2165617"/>
-                </a:lnTo>
-                <a:lnTo>
-                  <a:pt x="824652" y="1949182"/>
+                  <a:pt x="1199494" y="2915301"/>
+                </a:lnTo>
+                <a:lnTo>
+                  <a:pt x="1299952" y="2915301"/>
+                </a:lnTo>
+                <a:lnTo>
+                  <a:pt x="1949178" y="2540458"/>
+                </a:lnTo>
+                <a:lnTo>
+                  <a:pt x="1199494" y="2540458"/>
+                </a:lnTo>
+                <a:lnTo>
+                  <a:pt x="1199494" y="2165616"/>
+                </a:lnTo>
+                <a:lnTo>
+                  <a:pt x="824652" y="1949183"/>
                 </a:lnTo>
                 <a:close/>
-              </a:path>
-              <a:path w="3123184" h="4114800">
                 <a:moveTo>
-                  <a:pt x="449810" y="1632365"/>
+                  <a:pt x="449810" y="1632366"/>
                 </a:moveTo>
                 <a:lnTo>
-                  <a:pt x="74968" y="1415931"/>
-                </a:lnTo>
-                <a:lnTo>
-                  <a:pt x="74968" y="3290145"/>
-                </a:lnTo>
-                <a:lnTo>
-                  <a:pt x="74968" y="3664988"/>
-                </a:lnTo>
-                <a:lnTo>
-                  <a:pt x="74968" y="4039831"/>
-                </a:lnTo>
-                <a:lnTo>
-                  <a:pt x="1357902" y="4039831"/>
-                </a:lnTo>
-                <a:lnTo>
-                  <a:pt x="1574336" y="3664988"/>
-                </a:lnTo>
-                <a:lnTo>
-                  <a:pt x="449810" y="3664988"/>
-                </a:lnTo>
-                <a:lnTo>
-                  <a:pt x="449810" y="3290145"/>
+                  <a:pt x="74968" y="1415932"/>
+                </a:lnTo>
+                <a:lnTo>
+                  <a:pt x="74968" y="3290143"/>
+                </a:lnTo>
+                <a:lnTo>
+                  <a:pt x="74968" y="3664985"/>
+                </a:lnTo>
+                <a:lnTo>
+                  <a:pt x="74968" y="4039827"/>
+                </a:lnTo>
+                <a:lnTo>
+                  <a:pt x="1357902" y="4039827"/>
+                </a:lnTo>
+                <a:lnTo>
+                  <a:pt x="1574336" y="3664985"/>
+                </a:lnTo>
+                <a:lnTo>
+                  <a:pt x="449810" y="3664985"/>
+                </a:lnTo>
+                <a:lnTo>
+                  <a:pt x="449810" y="3290143"/>
                 </a:lnTo>
                 <a:close/>
-              </a:path>
-              <a:path w="3123184" h="4114800">
                 <a:moveTo>
-                  <a:pt x="1732744" y="4039831"/>
+                  <a:pt x="1732744" y="4039827"/>
                 </a:moveTo>
                 <a:lnTo>
-                  <a:pt x="1949178" y="3664988"/>
-                </a:lnTo>
-                <a:lnTo>
-                  <a:pt x="1724273" y="3664988"/>
-                </a:lnTo>
-                <a:lnTo>
-                  <a:pt x="1507839" y="4039831"/>
+                  <a:pt x="1949178" y="3664985"/>
+                </a:lnTo>
+                <a:lnTo>
+                  <a:pt x="1724273" y="3664985"/>
+                </a:lnTo>
+                <a:lnTo>
+                  <a:pt x="1507839" y="4039827"/>
                 </a:lnTo>
                 <a:close/>
               </a:path>
@@ -4769,22 +4751,22 @@
             <a:pathLst>
               <a:path w="3123184" h="4114800">
                 <a:moveTo>
-                  <a:pt x="74968" y="291402"/>
+                  <a:pt x="74968" y="291406"/>
                 </a:moveTo>
                 <a:lnTo>
-                  <a:pt x="74968" y="1041088"/>
-                </a:lnTo>
-                <a:lnTo>
-                  <a:pt x="449810" y="1257522"/>
-                </a:lnTo>
-                <a:lnTo>
-                  <a:pt x="449810" y="1041088"/>
-                </a:lnTo>
-                <a:lnTo>
-                  <a:pt x="449810" y="666245"/>
-                </a:lnTo>
-                <a:lnTo>
-                  <a:pt x="1748338" y="1415931"/>
+                  <a:pt x="74968" y="1041090"/>
+                </a:lnTo>
+                <a:lnTo>
+                  <a:pt x="449810" y="1257524"/>
+                </a:lnTo>
+                <a:lnTo>
+                  <a:pt x="449810" y="1041090"/>
+                </a:lnTo>
+                <a:lnTo>
+                  <a:pt x="449810" y="666248"/>
+                </a:lnTo>
+                <a:lnTo>
+                  <a:pt x="1748338" y="1415932"/>
                 </a:lnTo>
                 <a:lnTo>
                   <a:pt x="1099036" y="1790774"/>
@@ -4793,103 +4775,97 @@
                   <a:pt x="1124526" y="1790774"/>
                 </a:lnTo>
                 <a:lnTo>
-                  <a:pt x="2423054" y="2540459"/>
-                </a:lnTo>
-                <a:lnTo>
-                  <a:pt x="1773752" y="2915302"/>
-                </a:lnTo>
-                <a:lnTo>
-                  <a:pt x="2398989" y="2915302"/>
-                </a:lnTo>
-                <a:lnTo>
-                  <a:pt x="3048215" y="2540459"/>
+                  <a:pt x="2423054" y="2540458"/>
+                </a:lnTo>
+                <a:lnTo>
+                  <a:pt x="1773752" y="2915301"/>
+                </a:lnTo>
+                <a:lnTo>
+                  <a:pt x="2398989" y="2915301"/>
+                </a:lnTo>
+                <a:lnTo>
+                  <a:pt x="3048215" y="2540458"/>
                 </a:lnTo>
                 <a:lnTo>
                   <a:pt x="1749762" y="1790774"/>
                 </a:lnTo>
                 <a:lnTo>
-                  <a:pt x="2398989" y="1415931"/>
-                </a:lnTo>
-                <a:lnTo>
-                  <a:pt x="2397564" y="1415931"/>
-                </a:lnTo>
-                <a:lnTo>
-                  <a:pt x="1099036" y="666245"/>
-                </a:lnTo>
-                <a:lnTo>
-                  <a:pt x="449810" y="291402"/>
-                </a:lnTo>
-                <a:lnTo>
-                  <a:pt x="74968" y="74968"/>
+                  <a:pt x="2398989" y="1415932"/>
+                </a:lnTo>
+                <a:lnTo>
+                  <a:pt x="2397564" y="1415932"/>
+                </a:lnTo>
+                <a:lnTo>
+                  <a:pt x="1099036" y="666248"/>
+                </a:lnTo>
+                <a:lnTo>
+                  <a:pt x="449810" y="291406"/>
+                </a:lnTo>
+                <a:lnTo>
+                  <a:pt x="74968" y="74972"/>
                 </a:lnTo>
                 <a:close/>
-              </a:path>
-              <a:path w="3123184" h="4114800">
                 <a:moveTo>
-                  <a:pt x="824652" y="2915302"/>
+                  <a:pt x="824652" y="2915301"/>
                 </a:moveTo>
                 <a:lnTo>
-                  <a:pt x="1199494" y="2915302"/>
-                </a:lnTo>
-                <a:lnTo>
-                  <a:pt x="1299952" y="2915302"/>
-                </a:lnTo>
-                <a:lnTo>
-                  <a:pt x="1949178" y="2540459"/>
-                </a:lnTo>
-                <a:lnTo>
-                  <a:pt x="1199494" y="2540459"/>
-                </a:lnTo>
-                <a:lnTo>
-                  <a:pt x="1199494" y="2165617"/>
-                </a:lnTo>
-                <a:lnTo>
-                  <a:pt x="824652" y="1949182"/>
+                  <a:pt x="1199494" y="2915301"/>
+                </a:lnTo>
+                <a:lnTo>
+                  <a:pt x="1299952" y="2915301"/>
+                </a:lnTo>
+                <a:lnTo>
+                  <a:pt x="1949178" y="2540458"/>
+                </a:lnTo>
+                <a:lnTo>
+                  <a:pt x="1199494" y="2540458"/>
+                </a:lnTo>
+                <a:lnTo>
+                  <a:pt x="1199494" y="2165616"/>
+                </a:lnTo>
+                <a:lnTo>
+                  <a:pt x="824652" y="1949183"/>
                 </a:lnTo>
                 <a:close/>
-              </a:path>
-              <a:path w="3123184" h="4114800">
                 <a:moveTo>
-                  <a:pt x="449810" y="1632365"/>
+                  <a:pt x="449810" y="1632366"/>
                 </a:moveTo>
                 <a:lnTo>
-                  <a:pt x="74968" y="1415931"/>
-                </a:lnTo>
-                <a:lnTo>
-                  <a:pt x="74968" y="3290145"/>
-                </a:lnTo>
-                <a:lnTo>
-                  <a:pt x="74968" y="3664988"/>
-                </a:lnTo>
-                <a:lnTo>
-                  <a:pt x="74968" y="4039831"/>
-                </a:lnTo>
-                <a:lnTo>
-                  <a:pt x="1357902" y="4039831"/>
-                </a:lnTo>
-                <a:lnTo>
-                  <a:pt x="1574336" y="3664988"/>
-                </a:lnTo>
-                <a:lnTo>
-                  <a:pt x="449810" y="3664988"/>
-                </a:lnTo>
-                <a:lnTo>
-                  <a:pt x="449810" y="3290145"/>
+                  <a:pt x="74968" y="1415932"/>
+                </a:lnTo>
+                <a:lnTo>
+                  <a:pt x="74968" y="3290143"/>
+                </a:lnTo>
+                <a:lnTo>
+                  <a:pt x="74968" y="3664985"/>
+                </a:lnTo>
+                <a:lnTo>
+                  <a:pt x="74968" y="4039827"/>
+                </a:lnTo>
+                <a:lnTo>
+                  <a:pt x="1357902" y="4039827"/>
+                </a:lnTo>
+                <a:lnTo>
+                  <a:pt x="1574336" y="3664985"/>
+                </a:lnTo>
+                <a:lnTo>
+                  <a:pt x="449810" y="3664985"/>
+                </a:lnTo>
+                <a:lnTo>
+                  <a:pt x="449810" y="3290143"/>
                 </a:lnTo>
                 <a:close/>
-              </a:path>
-              <a:path w="3123184" h="4114800">
                 <a:moveTo>
-                  <a:pt x="1732744" y="4039831"/>
+                  <a:pt x="1732744" y="4039827"/>
                 </a:moveTo>
                 <a:lnTo>
-                  <a:pt x="1949178" y="3664988"/>
-                </a:lnTo>
-                <a:lnTo>
-                  <a:pt x="1724273" y="3664988"/>
-                </a:lnTo>
-                <a:lnTo>
-                  <a:pt x="1507839" y="4039831"/>
+                  <a:pt x="1949178" y="3664985"/>
+                </a:lnTo>
+                <a:lnTo>
+                  <a:pt x="1724273" y="3664985"/>
+                </a:lnTo>
+                <a:lnTo>
+                  <a:pt x="1507839" y="4039827"/>
                 </a:lnTo>
                 <a:close/>
               </a:path>
@@ -5112,22 +5088,22 @@
             <a:pathLst>
               <a:path w="3123184" h="4114800">
                 <a:moveTo>
-                  <a:pt x="74968" y="291402"/>
+                  <a:pt x="74968" y="291406"/>
                 </a:moveTo>
                 <a:lnTo>
-                  <a:pt x="74968" y="1041088"/>
-                </a:lnTo>
-                <a:lnTo>
-                  <a:pt x="449810" y="1257522"/>
-                </a:lnTo>
-                <a:lnTo>
-                  <a:pt x="449810" y="1041088"/>
-                </a:lnTo>
-                <a:lnTo>
-                  <a:pt x="449810" y="666245"/>
-                </a:lnTo>
-                <a:lnTo>
-                  <a:pt x="1748338" y="1415931"/>
+                  <a:pt x="74968" y="1041090"/>
+                </a:lnTo>
+                <a:lnTo>
+                  <a:pt x="449810" y="1257524"/>
+                </a:lnTo>
+                <a:lnTo>
+                  <a:pt x="449810" y="1041090"/>
+                </a:lnTo>
+                <a:lnTo>
+                  <a:pt x="449810" y="666248"/>
+                </a:lnTo>
+                <a:lnTo>
+                  <a:pt x="1748338" y="1415932"/>
                 </a:lnTo>
                 <a:lnTo>
                   <a:pt x="1099036" y="1790774"/>
@@ -5136,103 +5112,97 @@
                   <a:pt x="1124526" y="1790774"/>
                 </a:lnTo>
                 <a:lnTo>
-                  <a:pt x="2423054" y="2540459"/>
-                </a:lnTo>
-                <a:lnTo>
-                  <a:pt x="1773752" y="2915302"/>
-                </a:lnTo>
-                <a:lnTo>
-                  <a:pt x="2398989" y="2915302"/>
-                </a:lnTo>
-                <a:lnTo>
-                  <a:pt x="3048215" y="2540459"/>
+                  <a:pt x="2423054" y="2540458"/>
+                </a:lnTo>
+                <a:lnTo>
+                  <a:pt x="1773752" y="2915301"/>
+                </a:lnTo>
+                <a:lnTo>
+                  <a:pt x="2398989" y="2915301"/>
+                </a:lnTo>
+                <a:lnTo>
+                  <a:pt x="3048215" y="2540458"/>
                 </a:lnTo>
                 <a:lnTo>
                   <a:pt x="1749762" y="1790774"/>
                 </a:lnTo>
                 <a:lnTo>
-                  <a:pt x="2398989" y="1415931"/>
-                </a:lnTo>
-                <a:lnTo>
-                  <a:pt x="2397564" y="1415931"/>
-                </a:lnTo>
-                <a:lnTo>
-                  <a:pt x="1099036" y="666245"/>
-                </a:lnTo>
-                <a:lnTo>
-                  <a:pt x="449810" y="291402"/>
-                </a:lnTo>
-                <a:lnTo>
-                  <a:pt x="74968" y="74968"/>
+                  <a:pt x="2398989" y="1415932"/>
+                </a:lnTo>
+                <a:lnTo>
+                  <a:pt x="2397564" y="1415932"/>
+                </a:lnTo>
+                <a:lnTo>
+                  <a:pt x="1099036" y="666248"/>
+                </a:lnTo>
+                <a:lnTo>
+                  <a:pt x="449810" y="291406"/>
+                </a:lnTo>
+                <a:lnTo>
+                  <a:pt x="74968" y="74972"/>
                 </a:lnTo>
                 <a:close/>
-              </a:path>
-              <a:path w="3123184" h="4114800">
                 <a:moveTo>
-                  <a:pt x="824652" y="2915302"/>
+                  <a:pt x="824652" y="2915301"/>
                 </a:moveTo>
                 <a:lnTo>
-                  <a:pt x="1199494" y="2915302"/>
-                </a:lnTo>
-                <a:lnTo>
-                  <a:pt x="1299952" y="2915302"/>
-                </a:lnTo>
-                <a:lnTo>
-                  <a:pt x="1949178" y="2540459"/>
-                </a:lnTo>
-                <a:lnTo>
-                  <a:pt x="1199494" y="2540459"/>
-                </a:lnTo>
-                <a:lnTo>
-                  <a:pt x="1199494" y="2165617"/>
-                </a:lnTo>
-                <a:lnTo>
-                  <a:pt x="824652" y="1949182"/>
+                  <a:pt x="1199494" y="2915301"/>
+                </a:lnTo>
+                <a:lnTo>
+                  <a:pt x="1299952" y="2915301"/>
+                </a:lnTo>
+                <a:lnTo>
+                  <a:pt x="1949178" y="2540458"/>
+                </a:lnTo>
+                <a:lnTo>
+                  <a:pt x="1199494" y="2540458"/>
+                </a:lnTo>
+                <a:lnTo>
+                  <a:pt x="1199494" y="2165616"/>
+                </a:lnTo>
+                <a:lnTo>
+                  <a:pt x="824652" y="1949183"/>
                 </a:lnTo>
                 <a:close/>
-              </a:path>
-              <a:path w="3123184" h="4114800">
                 <a:moveTo>
-                  <a:pt x="449810" y="1632365"/>
+                  <a:pt x="449810" y="1632366"/>
                 </a:moveTo>
                 <a:lnTo>
-                  <a:pt x="74968" y="1415931"/>
-                </a:lnTo>
-                <a:lnTo>
-                  <a:pt x="74968" y="3290145"/>
-                </a:lnTo>
-                <a:lnTo>
-                  <a:pt x="74968" y="3664988"/>
-                </a:lnTo>
-                <a:lnTo>
-                  <a:pt x="74968" y="4039831"/>
-                </a:lnTo>
-                <a:lnTo>
-                  <a:pt x="1357902" y="4039831"/>
-                </a:lnTo>
-                <a:lnTo>
-                  <a:pt x="1574336" y="3664988"/>
-                </a:lnTo>
-                <a:lnTo>
-                  <a:pt x="449810" y="3664988"/>
-                </a:lnTo>
-                <a:lnTo>
-                  <a:pt x="449810" y="3290145"/>
+                  <a:pt x="74968" y="1415932"/>
+                </a:lnTo>
+                <a:lnTo>
+                  <a:pt x="74968" y="3290143"/>
+                </a:lnTo>
+                <a:lnTo>
+                  <a:pt x="74968" y="3664985"/>
+                </a:lnTo>
+                <a:lnTo>
+                  <a:pt x="74968" y="4039827"/>
+                </a:lnTo>
+                <a:lnTo>
+                  <a:pt x="1357902" y="4039827"/>
+                </a:lnTo>
+                <a:lnTo>
+                  <a:pt x="1574336" y="3664985"/>
+                </a:lnTo>
+                <a:lnTo>
+                  <a:pt x="449810" y="3664985"/>
+                </a:lnTo>
+                <a:lnTo>
+                  <a:pt x="449810" y="3290143"/>
                 </a:lnTo>
                 <a:close/>
-              </a:path>
-              <a:path w="3123184" h="4114800">
                 <a:moveTo>
-                  <a:pt x="1732744" y="4039831"/>
+                  <a:pt x="1732744" y="4039827"/>
                 </a:moveTo>
                 <a:lnTo>
-                  <a:pt x="1949178" y="3664988"/>
-                </a:lnTo>
-                <a:lnTo>
-                  <a:pt x="1724273" y="3664988"/>
-                </a:lnTo>
-                <a:lnTo>
-                  <a:pt x="1507839" y="4039831"/>
+                  <a:pt x="1949178" y="3664985"/>
+                </a:lnTo>
+                <a:lnTo>
+                  <a:pt x="1724273" y="3664985"/>
+                </a:lnTo>
+                <a:lnTo>
+                  <a:pt x="1507839" y="4039827"/>
                 </a:lnTo>
                 <a:close/>
               </a:path>
@@ -5605,19 +5575,19 @@
             <a:pathLst>
               <a:path w="192786" h="254000">
                 <a:moveTo>
-                  <a:pt x="4627" y="17987"/>
+                  <a:pt x="4627" y="17989"/>
                 </a:moveTo>
                 <a:lnTo>
-                  <a:pt x="4627" y="64264"/>
-                </a:lnTo>
-                <a:lnTo>
-                  <a:pt x="27765" y="77624"/>
-                </a:lnTo>
-                <a:lnTo>
-                  <a:pt x="27765" y="64264"/>
-                </a:lnTo>
-                <a:lnTo>
-                  <a:pt x="27765" y="41126"/>
+                  <a:pt x="4627" y="64265"/>
+                </a:lnTo>
+                <a:lnTo>
+                  <a:pt x="27765" y="77625"/>
+                </a:lnTo>
+                <a:lnTo>
+                  <a:pt x="27765" y="64265"/>
+                </a:lnTo>
+                <a:lnTo>
+                  <a:pt x="27765" y="41127"/>
                 </a:lnTo>
                 <a:lnTo>
                   <a:pt x="107920" y="87403"/>
@@ -5629,16 +5599,16 @@
                   <a:pt x="69414" y="110541"/>
                 </a:lnTo>
                 <a:lnTo>
-                  <a:pt x="149568" y="156818"/>
-                </a:lnTo>
-                <a:lnTo>
-                  <a:pt x="109489" y="179956"/>
-                </a:lnTo>
-                <a:lnTo>
-                  <a:pt x="148083" y="179956"/>
-                </a:lnTo>
-                <a:lnTo>
-                  <a:pt x="188158" y="156818"/>
+                  <a:pt x="149568" y="156817"/>
+                </a:lnTo>
+                <a:lnTo>
+                  <a:pt x="109489" y="179955"/>
+                </a:lnTo>
+                <a:lnTo>
+                  <a:pt x="148083" y="179955"/>
+                </a:lnTo>
+                <a:lnTo>
+                  <a:pt x="188158" y="156817"/>
                 </a:lnTo>
                 <a:lnTo>
                   <a:pt x="108008" y="110541"/>
@@ -5650,41 +5620,37 @@
                   <a:pt x="147995" y="87403"/>
                 </a:lnTo>
                 <a:lnTo>
-                  <a:pt x="67840" y="41126"/>
-                </a:lnTo>
-                <a:lnTo>
-                  <a:pt x="27765" y="17987"/>
-                </a:lnTo>
-                <a:lnTo>
-                  <a:pt x="4627" y="4627"/>
+                  <a:pt x="67840" y="41127"/>
+                </a:lnTo>
+                <a:lnTo>
+                  <a:pt x="27765" y="17989"/>
+                </a:lnTo>
+                <a:lnTo>
+                  <a:pt x="4627" y="4629"/>
                 </a:lnTo>
                 <a:close/>
-              </a:path>
-              <a:path w="192786" h="254000">
                 <a:moveTo>
-                  <a:pt x="50903" y="179956"/>
+                  <a:pt x="50903" y="179955"/>
                 </a:moveTo>
                 <a:lnTo>
-                  <a:pt x="74041" y="179956"/>
-                </a:lnTo>
-                <a:lnTo>
-                  <a:pt x="80242" y="179956"/>
-                </a:lnTo>
-                <a:lnTo>
-                  <a:pt x="120317" y="156818"/>
-                </a:lnTo>
-                <a:lnTo>
-                  <a:pt x="74041" y="156818"/>
-                </a:lnTo>
-                <a:lnTo>
-                  <a:pt x="74041" y="133680"/>
-                </a:lnTo>
-                <a:lnTo>
-                  <a:pt x="50903" y="120319"/>
+                  <a:pt x="74041" y="179955"/>
+                </a:lnTo>
+                <a:lnTo>
+                  <a:pt x="80242" y="179955"/>
+                </a:lnTo>
+                <a:lnTo>
+                  <a:pt x="120317" y="156817"/>
+                </a:lnTo>
+                <a:lnTo>
+                  <a:pt x="74041" y="156817"/>
+                </a:lnTo>
+                <a:lnTo>
+                  <a:pt x="74041" y="133679"/>
+                </a:lnTo>
+                <a:lnTo>
+                  <a:pt x="50903" y="120320"/>
                 </a:lnTo>
                 <a:close/>
-              </a:path>
-              <a:path w="192786" h="254000">
                 <a:moveTo>
                   <a:pt x="27765" y="100763"/>
                 </a:moveTo>
@@ -5692,40 +5658,38 @@
                   <a:pt x="4627" y="87403"/>
                 </a:lnTo>
                 <a:lnTo>
-                  <a:pt x="4627" y="203095"/>
-                </a:lnTo>
-                <a:lnTo>
-                  <a:pt x="4627" y="226233"/>
-                </a:lnTo>
-                <a:lnTo>
-                  <a:pt x="4627" y="249372"/>
-                </a:lnTo>
-                <a:lnTo>
-                  <a:pt x="83819" y="249372"/>
-                </a:lnTo>
-                <a:lnTo>
-                  <a:pt x="97179" y="226233"/>
-                </a:lnTo>
-                <a:lnTo>
-                  <a:pt x="27765" y="226233"/>
-                </a:lnTo>
-                <a:lnTo>
-                  <a:pt x="27765" y="203095"/>
+                  <a:pt x="4627" y="203094"/>
+                </a:lnTo>
+                <a:lnTo>
+                  <a:pt x="4627" y="226232"/>
+                </a:lnTo>
+                <a:lnTo>
+                  <a:pt x="4627" y="249370"/>
+                </a:lnTo>
+                <a:lnTo>
+                  <a:pt x="83819" y="249370"/>
+                </a:lnTo>
+                <a:lnTo>
+                  <a:pt x="97179" y="226232"/>
+                </a:lnTo>
+                <a:lnTo>
+                  <a:pt x="27765" y="226232"/>
+                </a:lnTo>
+                <a:lnTo>
+                  <a:pt x="27765" y="203094"/>
                 </a:lnTo>
                 <a:close/>
-              </a:path>
-              <a:path w="192786" h="254000">
                 <a:moveTo>
-                  <a:pt x="106957" y="249372"/>
+                  <a:pt x="106957" y="249370"/>
                 </a:moveTo>
                 <a:lnTo>
-                  <a:pt x="120317" y="226233"/>
-                </a:lnTo>
-                <a:lnTo>
-                  <a:pt x="106434" y="226233"/>
-                </a:lnTo>
-                <a:lnTo>
-                  <a:pt x="93075" y="249372"/>
+                  <a:pt x="120317" y="226232"/>
+                </a:lnTo>
+                <a:lnTo>
+                  <a:pt x="106434" y="226232"/>
+                </a:lnTo>
+                <a:lnTo>
+                  <a:pt x="93075" y="249370"/>
                 </a:lnTo>
                 <a:close/>
               </a:path>
@@ -6019,19 +5983,19 @@
             <a:pathLst>
               <a:path w="192786" h="254000">
                 <a:moveTo>
-                  <a:pt x="4627" y="17987"/>
+                  <a:pt x="4627" y="17989"/>
                 </a:moveTo>
                 <a:lnTo>
-                  <a:pt x="4627" y="64264"/>
-                </a:lnTo>
-                <a:lnTo>
-                  <a:pt x="27765" y="77624"/>
-                </a:lnTo>
-                <a:lnTo>
-                  <a:pt x="27765" y="64264"/>
-                </a:lnTo>
-                <a:lnTo>
-                  <a:pt x="27765" y="41126"/>
+                  <a:pt x="4627" y="64265"/>
+                </a:lnTo>
+                <a:lnTo>
+                  <a:pt x="27765" y="77625"/>
+                </a:lnTo>
+                <a:lnTo>
+                  <a:pt x="27765" y="64265"/>
+                </a:lnTo>
+                <a:lnTo>
+                  <a:pt x="27765" y="41127"/>
                 </a:lnTo>
                 <a:lnTo>
                   <a:pt x="107920" y="87403"/>
@@ -6043,16 +6007,16 @@
                   <a:pt x="69414" y="110541"/>
                 </a:lnTo>
                 <a:lnTo>
-                  <a:pt x="149568" y="156818"/>
-                </a:lnTo>
-                <a:lnTo>
-                  <a:pt x="109489" y="179956"/>
-                </a:lnTo>
-                <a:lnTo>
-                  <a:pt x="148083" y="179956"/>
-                </a:lnTo>
-                <a:lnTo>
-                  <a:pt x="188158" y="156818"/>
+                  <a:pt x="149568" y="156817"/>
+                </a:lnTo>
+                <a:lnTo>
+                  <a:pt x="109489" y="179955"/>
+                </a:lnTo>
+                <a:lnTo>
+                  <a:pt x="148083" y="179955"/>
+                </a:lnTo>
+                <a:lnTo>
+                  <a:pt x="188158" y="156817"/>
                 </a:lnTo>
                 <a:lnTo>
                   <a:pt x="108008" y="110541"/>
@@ -6064,41 +6028,37 @@
                   <a:pt x="147995" y="87403"/>
                 </a:lnTo>
                 <a:lnTo>
-                  <a:pt x="67840" y="41126"/>
-                </a:lnTo>
-                <a:lnTo>
-                  <a:pt x="27765" y="17987"/>
-                </a:lnTo>
-                <a:lnTo>
-                  <a:pt x="4627" y="4627"/>
+                  <a:pt x="67840" y="41127"/>
+                </a:lnTo>
+                <a:lnTo>
+                  <a:pt x="27765" y="17989"/>
+                </a:lnTo>
+                <a:lnTo>
+                  <a:pt x="4627" y="4629"/>
                 </a:lnTo>
                 <a:close/>
-              </a:path>
-              <a:path w="192786" h="254000">
                 <a:moveTo>
-                  <a:pt x="50903" y="179956"/>
+                  <a:pt x="50903" y="179955"/>
                 </a:moveTo>
                 <a:lnTo>
-                  <a:pt x="74041" y="179956"/>
-                </a:lnTo>
-                <a:lnTo>
-                  <a:pt x="80242" y="179956"/>
-                </a:lnTo>
-                <a:lnTo>
-                  <a:pt x="120317" y="156818"/>
-                </a:lnTo>
-                <a:lnTo>
-                  <a:pt x="74041" y="156818"/>
-                </a:lnTo>
-                <a:lnTo>
-                  <a:pt x="74041" y="133680"/>
-                </a:lnTo>
-                <a:lnTo>
-                  <a:pt x="50903" y="120319"/>
+                  <a:pt x="74041" y="179955"/>
+                </a:lnTo>
+                <a:lnTo>
+                  <a:pt x="80242" y="179955"/>
+                </a:lnTo>
+                <a:lnTo>
+                  <a:pt x="120317" y="156817"/>
+                </a:lnTo>
+                <a:lnTo>
+                  <a:pt x="74041" y="156817"/>
+                </a:lnTo>
+                <a:lnTo>
+                  <a:pt x="74041" y="133679"/>
+                </a:lnTo>
+                <a:lnTo>
+                  <a:pt x="50903" y="120320"/>
                 </a:lnTo>
                 <a:close/>
-              </a:path>
-              <a:path w="192786" h="254000">
                 <a:moveTo>
                   <a:pt x="27765" y="100763"/>
                 </a:moveTo>
@@ -6106,40 +6066,38 @@
                   <a:pt x="4627" y="87403"/>
                 </a:lnTo>
                 <a:lnTo>
-                  <a:pt x="4627" y="203095"/>
-                </a:lnTo>
-                <a:lnTo>
-                  <a:pt x="4627" y="226233"/>
-                </a:lnTo>
-                <a:lnTo>
-                  <a:pt x="4627" y="249372"/>
-                </a:lnTo>
-                <a:lnTo>
-                  <a:pt x="83819" y="249372"/>
-                </a:lnTo>
-                <a:lnTo>
-                  <a:pt x="97179" y="226233"/>
-                </a:lnTo>
-                <a:lnTo>
-                  <a:pt x="27765" y="226233"/>
-                </a:lnTo>
-                <a:lnTo>
-                  <a:pt x="27765" y="203095"/>
+                  <a:pt x="4627" y="203094"/>
+                </a:lnTo>
+                <a:lnTo>
+                  <a:pt x="4627" y="226232"/>
+                </a:lnTo>
+                <a:lnTo>
+                  <a:pt x="4627" y="249370"/>
+                </a:lnTo>
+                <a:lnTo>
+                  <a:pt x="83819" y="249370"/>
+                </a:lnTo>
+                <a:lnTo>
+                  <a:pt x="97179" y="226232"/>
+                </a:lnTo>
+                <a:lnTo>
+                  <a:pt x="27765" y="226232"/>
+                </a:lnTo>
+                <a:lnTo>
+                  <a:pt x="27765" y="203094"/>
                 </a:lnTo>
                 <a:close/>
-              </a:path>
-              <a:path w="192786" h="254000">
                 <a:moveTo>
-                  <a:pt x="106957" y="249372"/>
+                  <a:pt x="106957" y="249370"/>
                 </a:moveTo>
                 <a:lnTo>
-                  <a:pt x="120317" y="226233"/>
-                </a:lnTo>
-                <a:lnTo>
-                  <a:pt x="106434" y="226233"/>
-                </a:lnTo>
-                <a:lnTo>
-                  <a:pt x="93075" y="249372"/>
+                  <a:pt x="120317" y="226232"/>
+                </a:lnTo>
+                <a:lnTo>
+                  <a:pt x="106434" y="226232"/>
+                </a:lnTo>
+                <a:lnTo>
+                  <a:pt x="93075" y="249370"/>
                 </a:lnTo>
                 <a:close/>
               </a:path>

--- a/bigtree/samples/bigtree_lab_charts.pptx
+++ b/bigtree/samples/bigtree_lab_charts.pptx
@@ -3013,6 +3013,13 @@
     <cs:fontRef idx="minor">
       <a:schemeClr val="tx1"/>
     </cs:fontRef>
+    <cs:spPr>
+      <a:ln w="9525">
+        <a:solidFill>
+          <a:schemeClr val="tx2"/>
+        </a:solidFill>
+      </a:ln>
+    </cs:spPr>
   </cs:dataPointLine>
   <cs:dataPointMarker>
     <cs:lnRef idx="0"/>

--- a/bigtree/samples/bigtree_lab_charts.pptx
+++ b/bigtree/samples/bigtree_lab_charts.pptx
@@ -1456,7 +1456,7 @@
       <c:catAx>
         <c:axId val="1001"/>
         <c:scaling>
-          <c:orientation val="minMax"/>
+          <c:orientation val="maxMin"/>
         </c:scaling>
         <c:delete val="0"/>
         <c:axPos val="l"/>
@@ -1528,7 +1528,7 @@
           </a:p>
         </c:txPr>
         <c:crossAx val="1001"/>
-        <c:crosses val="autoZero"/>
+        <c:crosses val="max"/>
         <c:crossBetween val="between"/>
       </c:valAx>
     </c:plotArea>
